--- a/Grangia x 40 anni.pptx
+++ b/Grangia x 40 anni.pptx
@@ -8,25 +8,25 @@
     <p:notesMasterId r:id="rId26"/>
   </p:notesMasterIdLst>
   <p:sldIdLst>
-    <p:sldId id="256" r:id="rId2"/>
-    <p:sldId id="257" r:id="rId3"/>
-    <p:sldId id="258" r:id="rId4"/>
-    <p:sldId id="264" r:id="rId5"/>
-    <p:sldId id="259" r:id="rId6"/>
-    <p:sldId id="261" r:id="rId7"/>
-    <p:sldId id="262" r:id="rId8"/>
-    <p:sldId id="263" r:id="rId9"/>
-    <p:sldId id="265" r:id="rId10"/>
-    <p:sldId id="266" r:id="rId11"/>
-    <p:sldId id="267" r:id="rId12"/>
-    <p:sldId id="268" r:id="rId13"/>
-    <p:sldId id="269" r:id="rId14"/>
-    <p:sldId id="271" r:id="rId15"/>
-    <p:sldId id="272" r:id="rId16"/>
-    <p:sldId id="273" r:id="rId17"/>
-    <p:sldId id="274" r:id="rId18"/>
-    <p:sldId id="277" r:id="rId19"/>
-    <p:sldId id="278" r:id="rId20"/>
+    <p:sldId id="257" r:id="rId2"/>
+    <p:sldId id="258" r:id="rId3"/>
+    <p:sldId id="264" r:id="rId4"/>
+    <p:sldId id="259" r:id="rId5"/>
+    <p:sldId id="261" r:id="rId6"/>
+    <p:sldId id="262" r:id="rId7"/>
+    <p:sldId id="263" r:id="rId8"/>
+    <p:sldId id="265" r:id="rId9"/>
+    <p:sldId id="266" r:id="rId10"/>
+    <p:sldId id="267" r:id="rId11"/>
+    <p:sldId id="268" r:id="rId12"/>
+    <p:sldId id="269" r:id="rId13"/>
+    <p:sldId id="271" r:id="rId14"/>
+    <p:sldId id="272" r:id="rId15"/>
+    <p:sldId id="273" r:id="rId16"/>
+    <p:sldId id="274" r:id="rId17"/>
+    <p:sldId id="277" r:id="rId18"/>
+    <p:sldId id="278" r:id="rId19"/>
+    <p:sldId id="283" r:id="rId20"/>
     <p:sldId id="279" r:id="rId21"/>
     <p:sldId id="280" r:id="rId22"/>
     <p:sldId id="275" r:id="rId23"/>
@@ -220,7 +220,7 @@
           <a:p>
             <a:fld id="{AB5321D6-B4FF-4042-AABD-C1B575FDF3AD}" type="datetimeFigureOut">
               <a:rPr lang="it-IT" smtClean="0"/>
-              <a:t>25/08/2026</a:t>
+              <a:t>10/09/2026</a:t>
             </a:fld>
             <a:endParaRPr lang="it-IT"/>
           </a:p>
@@ -492,6 +492,114 @@
   <p:cSld>
     <p:spTree>
       <p:nvGrpSpPr>
+        <p:cNvPr id="1" name="">
+          <a:extLst>
+            <a:ext uri="{FF2B5EF4-FFF2-40B4-BE49-F238E27FC236}">
+              <a16:creationId xmlns:a16="http://schemas.microsoft.com/office/drawing/2014/main" id="{BC479A3A-3378-D308-84EA-5E2CDC70E2E7}"/>
+            </a:ext>
+          </a:extLst>
+        </p:cNvPr>
+        <p:cNvGrpSpPr/>
+        <p:nvPr/>
+      </p:nvGrpSpPr>
+      <p:grpSpPr>
+        <a:xfrm>
+          <a:off x="0" y="0"/>
+          <a:ext cx="0" cy="0"/>
+          <a:chOff x="0" y="0"/>
+          <a:chExt cx="0" cy="0"/>
+        </a:xfrm>
+      </p:grpSpPr>
+      <p:sp>
+        <p:nvSpPr>
+          <p:cNvPr id="2" name="Segnaposto immagine diapositiva 1">
+            <a:extLst>
+              <a:ext uri="{FF2B5EF4-FFF2-40B4-BE49-F238E27FC236}">
+                <a16:creationId xmlns:a16="http://schemas.microsoft.com/office/drawing/2014/main" id="{57710022-B211-CC90-F5D8-91E5BDD1829B}"/>
+              </a:ext>
+            </a:extLst>
+          </p:cNvPr>
+          <p:cNvSpPr>
+            <a:spLocks noGrp="1" noRot="1" noChangeAspect="1"/>
+          </p:cNvSpPr>
+          <p:nvPr>
+            <p:ph type="sldImg"/>
+          </p:nvPr>
+        </p:nvSpPr>
+        <p:spPr/>
+      </p:sp>
+      <p:sp>
+        <p:nvSpPr>
+          <p:cNvPr id="3" name="Segnaposto note 2">
+            <a:extLst>
+              <a:ext uri="{FF2B5EF4-FFF2-40B4-BE49-F238E27FC236}">
+                <a16:creationId xmlns:a16="http://schemas.microsoft.com/office/drawing/2014/main" id="{A9CA7F1C-023F-4C7A-7B14-08615C4392F4}"/>
+              </a:ext>
+            </a:extLst>
+          </p:cNvPr>
+          <p:cNvSpPr>
+            <a:spLocks noGrp="1"/>
+          </p:cNvSpPr>
+          <p:nvPr>
+            <p:ph type="body" idx="1"/>
+          </p:nvPr>
+        </p:nvSpPr>
+        <p:spPr/>
+        <p:txBody>
+          <a:bodyPr/>
+          <a:lstStyle/>
+          <a:p>
+            <a:endParaRPr lang="it-IT" dirty="0"/>
+          </a:p>
+        </p:txBody>
+      </p:sp>
+      <p:sp>
+        <p:nvSpPr>
+          <p:cNvPr id="4" name="Segnaposto numero diapositiva 3">
+            <a:extLst>
+              <a:ext uri="{FF2B5EF4-FFF2-40B4-BE49-F238E27FC236}">
+                <a16:creationId xmlns:a16="http://schemas.microsoft.com/office/drawing/2014/main" id="{2F6065AC-D08A-A34E-6E1E-1B385BD3D7F0}"/>
+              </a:ext>
+            </a:extLst>
+          </p:cNvPr>
+          <p:cNvSpPr>
+            <a:spLocks noGrp="1"/>
+          </p:cNvSpPr>
+          <p:nvPr>
+            <p:ph type="sldNum" sz="quarter" idx="5"/>
+          </p:nvPr>
+        </p:nvSpPr>
+        <p:spPr/>
+        <p:txBody>
+          <a:bodyPr/>
+          <a:lstStyle/>
+          <a:p>
+            <a:fld id="{E39B68F3-A852-4277-BBB2-04ABA00AA9B5}" type="slidenum">
+              <a:rPr lang="it-IT" smtClean="0"/>
+              <a:t>19</a:t>
+            </a:fld>
+            <a:endParaRPr lang="it-IT"/>
+          </a:p>
+        </p:txBody>
+      </p:sp>
+    </p:spTree>
+    <p:extLst>
+      <p:ext uri="{BB962C8B-B14F-4D97-AF65-F5344CB8AC3E}">
+        <p14:creationId xmlns:p14="http://schemas.microsoft.com/office/powerpoint/2010/main" val="337069723"/>
+      </p:ext>
+    </p:extLst>
+  </p:cSld>
+  <p:clrMapOvr>
+    <a:masterClrMapping/>
+  </p:clrMapOvr>
+</p:notes>
+</file>
+
+<file path=ppt/notesSlides/notesSlide2.xml><?xml version="1.0" encoding="utf-8"?>
+<p:notes xmlns:a="http://schemas.openxmlformats.org/drawingml/2006/main" xmlns:r="http://schemas.openxmlformats.org/officeDocument/2006/relationships" xmlns:p="http://schemas.openxmlformats.org/presentationml/2006/main">
+  <p:cSld>
+    <p:spTree>
+      <p:nvGrpSpPr>
         <p:cNvPr id="1" name=""/>
         <p:cNvGrpSpPr/>
         <p:nvPr/>
@@ -571,7 +679,7 @@
 </p:notes>
 </file>
 
-<file path=ppt/notesSlides/notesSlide2.xml><?xml version="1.0" encoding="utf-8"?>
+<file path=ppt/notesSlides/notesSlide3.xml><?xml version="1.0" encoding="utf-8"?>
 <p:notes xmlns:a="http://schemas.openxmlformats.org/drawingml/2006/main" xmlns:r="http://schemas.openxmlformats.org/officeDocument/2006/relationships" xmlns:p="http://schemas.openxmlformats.org/presentationml/2006/main">
   <p:cSld>
     <p:spTree>
@@ -679,7 +787,7 @@
 </p:notes>
 </file>
 
-<file path=ppt/notesSlides/notesSlide3.xml><?xml version="1.0" encoding="utf-8"?>
+<file path=ppt/notesSlides/notesSlide4.xml><?xml version="1.0" encoding="utf-8"?>
 <p:notes xmlns:a="http://schemas.openxmlformats.org/drawingml/2006/main" xmlns:r="http://schemas.openxmlformats.org/officeDocument/2006/relationships" xmlns:p="http://schemas.openxmlformats.org/presentationml/2006/main">
   <p:cSld>
     <p:spTree>
@@ -934,7 +1042,7 @@
           <a:p>
             <a:fld id="{79278215-226C-4D49-B729-5CC4015CF1CE}" type="datetimeFigureOut">
               <a:rPr lang="it-IT" smtClean="0"/>
-              <a:t>25/08/2026</a:t>
+              <a:t>10/09/2026</a:t>
             </a:fld>
             <a:endParaRPr lang="it-IT"/>
           </a:p>
@@ -1132,7 +1240,7 @@
           <a:p>
             <a:fld id="{79278215-226C-4D49-B729-5CC4015CF1CE}" type="datetimeFigureOut">
               <a:rPr lang="it-IT" smtClean="0"/>
-              <a:t>25/08/2026</a:t>
+              <a:t>10/09/2026</a:t>
             </a:fld>
             <a:endParaRPr lang="it-IT"/>
           </a:p>
@@ -1340,7 +1448,7 @@
           <a:p>
             <a:fld id="{79278215-226C-4D49-B729-5CC4015CF1CE}" type="datetimeFigureOut">
               <a:rPr lang="it-IT" smtClean="0"/>
-              <a:t>25/08/2026</a:t>
+              <a:t>10/09/2026</a:t>
             </a:fld>
             <a:endParaRPr lang="it-IT"/>
           </a:p>
@@ -1538,7 +1646,7 @@
           <a:p>
             <a:fld id="{79278215-226C-4D49-B729-5CC4015CF1CE}" type="datetimeFigureOut">
               <a:rPr lang="it-IT" smtClean="0"/>
-              <a:t>25/08/2026</a:t>
+              <a:t>10/09/2026</a:t>
             </a:fld>
             <a:endParaRPr lang="it-IT"/>
           </a:p>
@@ -1813,7 +1921,7 @@
           <a:p>
             <a:fld id="{79278215-226C-4D49-B729-5CC4015CF1CE}" type="datetimeFigureOut">
               <a:rPr lang="it-IT" smtClean="0"/>
-              <a:t>25/08/2026</a:t>
+              <a:t>10/09/2026</a:t>
             </a:fld>
             <a:endParaRPr lang="it-IT"/>
           </a:p>
@@ -2078,7 +2186,7 @@
           <a:p>
             <a:fld id="{79278215-226C-4D49-B729-5CC4015CF1CE}" type="datetimeFigureOut">
               <a:rPr lang="it-IT" smtClean="0"/>
-              <a:t>25/08/2026</a:t>
+              <a:t>10/09/2026</a:t>
             </a:fld>
             <a:endParaRPr lang="it-IT"/>
           </a:p>
@@ -2490,7 +2598,7 @@
           <a:p>
             <a:fld id="{79278215-226C-4D49-B729-5CC4015CF1CE}" type="datetimeFigureOut">
               <a:rPr lang="it-IT" smtClean="0"/>
-              <a:t>25/08/2026</a:t>
+              <a:t>10/09/2026</a:t>
             </a:fld>
             <a:endParaRPr lang="it-IT"/>
           </a:p>
@@ -2631,7 +2739,7 @@
           <a:p>
             <a:fld id="{79278215-226C-4D49-B729-5CC4015CF1CE}" type="datetimeFigureOut">
               <a:rPr lang="it-IT" smtClean="0"/>
-              <a:t>25/08/2026</a:t>
+              <a:t>10/09/2026</a:t>
             </a:fld>
             <a:endParaRPr lang="it-IT"/>
           </a:p>
@@ -2744,7 +2852,7 @@
           <a:p>
             <a:fld id="{79278215-226C-4D49-B729-5CC4015CF1CE}" type="datetimeFigureOut">
               <a:rPr lang="it-IT" smtClean="0"/>
-              <a:t>25/08/2026</a:t>
+              <a:t>10/09/2026</a:t>
             </a:fld>
             <a:endParaRPr lang="it-IT"/>
           </a:p>
@@ -3055,7 +3163,7 @@
           <a:p>
             <a:fld id="{79278215-226C-4D49-B729-5CC4015CF1CE}" type="datetimeFigureOut">
               <a:rPr lang="it-IT" smtClean="0"/>
-              <a:t>25/08/2026</a:t>
+              <a:t>10/09/2026</a:t>
             </a:fld>
             <a:endParaRPr lang="it-IT"/>
           </a:p>
@@ -3343,7 +3451,7 @@
           <a:p>
             <a:fld id="{79278215-226C-4D49-B729-5CC4015CF1CE}" type="datetimeFigureOut">
               <a:rPr lang="it-IT" smtClean="0"/>
-              <a:t>25/08/2026</a:t>
+              <a:t>10/09/2026</a:t>
             </a:fld>
             <a:endParaRPr lang="it-IT"/>
           </a:p>
@@ -3584,7 +3692,7 @@
           <a:p>
             <a:fld id="{79278215-226C-4D49-B729-5CC4015CF1CE}" type="datetimeFigureOut">
               <a:rPr lang="it-IT" smtClean="0"/>
-              <a:t>25/08/2026</a:t>
+              <a:t>10/09/2026</a:t>
             </a:fld>
             <a:endParaRPr lang="it-IT"/>
           </a:p>
@@ -4014,7 +4122,7 @@
           <p:cNvPr id="2" name="Titolo 1">
             <a:extLst>
               <a:ext uri="{FF2B5EF4-FFF2-40B4-BE49-F238E27FC236}">
-                <a16:creationId xmlns:a16="http://schemas.microsoft.com/office/drawing/2014/main" id="{DF5ACB1B-E6F7-00D2-02CF-E006986BABF9}"/>
+                <a16:creationId xmlns:a16="http://schemas.microsoft.com/office/drawing/2014/main" id="{03653811-4608-F144-A825-AE815F2ACA54}"/>
               </a:ext>
             </a:extLst>
           </p:cNvPr>
@@ -4025,14 +4133,118 @@
             <p:ph type="ctrTitle"/>
           </p:nvPr>
         </p:nvSpPr>
-        <p:spPr/>
-        <p:txBody>
-          <a:bodyPr/>
+        <p:spPr>
+          <a:xfrm>
+            <a:off x="555522" y="688259"/>
+            <a:ext cx="11080955" cy="5309266"/>
+          </a:xfrm>
+        </p:spPr>
+        <p:txBody>
+          <a:bodyPr>
+            <a:normAutofit fontScale="90000"/>
+          </a:bodyPr>
           <a:lstStyle/>
           <a:p>
             <a:r>
-              <a:rPr lang="it-IT" dirty="0"/>
-              <a:t>Conto alla rovescia</a:t>
+              <a:rPr lang="it-IT" b="1" dirty="0">
+                <a:latin typeface="Calibri" panose="020F0502020204030204" pitchFamily="34" charset="0"/>
+                <a:ea typeface="Calibri" panose="020F0502020204030204" pitchFamily="34" charset="0"/>
+                <a:cs typeface="Calibri" panose="020F0502020204030204" pitchFamily="34" charset="0"/>
+              </a:rPr>
+              <a:t>Buongiorno</a:t>
+            </a:r>
+            <a:r>
+              <a:rPr lang="it-IT" dirty="0">
+                <a:latin typeface="Calibri" panose="020F0502020204030204" pitchFamily="34" charset="0"/>
+                <a:ea typeface="Calibri" panose="020F0502020204030204" pitchFamily="34" charset="0"/>
+                <a:cs typeface="Calibri" panose="020F0502020204030204" pitchFamily="34" charset="0"/>
+              </a:rPr>
+              <a:t>, </a:t>
+            </a:r>
+            <a:br>
+              <a:rPr lang="it-IT" dirty="0">
+                <a:latin typeface="Calibri" panose="020F0502020204030204" pitchFamily="34" charset="0"/>
+                <a:ea typeface="Calibri" panose="020F0502020204030204" pitchFamily="34" charset="0"/>
+                <a:cs typeface="Calibri" panose="020F0502020204030204" pitchFamily="34" charset="0"/>
+              </a:rPr>
+            </a:br>
+            <a:r>
+              <a:rPr lang="it-IT" dirty="0">
+                <a:latin typeface="Calibri" panose="020F0502020204030204" pitchFamily="34" charset="0"/>
+                <a:ea typeface="Calibri" panose="020F0502020204030204" pitchFamily="34" charset="0"/>
+                <a:cs typeface="Calibri" panose="020F0502020204030204" pitchFamily="34" charset="0"/>
+              </a:rPr>
+              <a:t>sei pronto per immergerti in un’</a:t>
+            </a:r>
+            <a:r>
+              <a:rPr lang="it-IT" b="1" dirty="0">
+                <a:latin typeface="Calibri" panose="020F0502020204030204" pitchFamily="34" charset="0"/>
+                <a:ea typeface="Calibri" panose="020F0502020204030204" pitchFamily="34" charset="0"/>
+                <a:cs typeface="Calibri" panose="020F0502020204030204" pitchFamily="34" charset="0"/>
+              </a:rPr>
+              <a:t>esperienza riflessiva</a:t>
+            </a:r>
+            <a:r>
+              <a:rPr lang="it-IT" dirty="0">
+                <a:latin typeface="Calibri" panose="020F0502020204030204" pitchFamily="34" charset="0"/>
+                <a:ea typeface="Calibri" panose="020F0502020204030204" pitchFamily="34" charset="0"/>
+                <a:cs typeface="Calibri" panose="020F0502020204030204" pitchFamily="34" charset="0"/>
+              </a:rPr>
+              <a:t>?</a:t>
+            </a:r>
+            <a:br>
+              <a:rPr lang="it-IT" dirty="0">
+                <a:latin typeface="Calibri" panose="020F0502020204030204" pitchFamily="34" charset="0"/>
+                <a:ea typeface="Calibri" panose="020F0502020204030204" pitchFamily="34" charset="0"/>
+                <a:cs typeface="Calibri" panose="020F0502020204030204" pitchFamily="34" charset="0"/>
+              </a:rPr>
+            </a:br>
+            <a:br>
+              <a:rPr lang="it-IT" dirty="0">
+                <a:latin typeface="Calibri" panose="020F0502020204030204" pitchFamily="34" charset="0"/>
+                <a:ea typeface="Calibri" panose="020F0502020204030204" pitchFamily="34" charset="0"/>
+                <a:cs typeface="Calibri" panose="020F0502020204030204" pitchFamily="34" charset="0"/>
+              </a:rPr>
+            </a:br>
+            <a:r>
+              <a:rPr lang="it-IT" dirty="0">
+                <a:latin typeface="Calibri" panose="020F0502020204030204" pitchFamily="34" charset="0"/>
+                <a:ea typeface="Calibri" panose="020F0502020204030204" pitchFamily="34" charset="0"/>
+                <a:cs typeface="Calibri" panose="020F0502020204030204" pitchFamily="34" charset="0"/>
+              </a:rPr>
+              <a:t>Ti anticipiamo che sarà un po’ </a:t>
+            </a:r>
+            <a:r>
+              <a:rPr lang="it-IT" b="1" dirty="0">
+                <a:latin typeface="Calibri" panose="020F0502020204030204" pitchFamily="34" charset="0"/>
+                <a:ea typeface="Calibri" panose="020F0502020204030204" pitchFamily="34" charset="0"/>
+                <a:cs typeface="Calibri" panose="020F0502020204030204" pitchFamily="34" charset="0"/>
+              </a:rPr>
+              <a:t>impegnativa</a:t>
+            </a:r>
+            <a:r>
+              <a:rPr lang="it-IT" dirty="0">
+                <a:latin typeface="Calibri" panose="020F0502020204030204" pitchFamily="34" charset="0"/>
+                <a:ea typeface="Calibri" panose="020F0502020204030204" pitchFamily="34" charset="0"/>
+                <a:cs typeface="Calibri" panose="020F0502020204030204" pitchFamily="34" charset="0"/>
+              </a:rPr>
+              <a:t>, ma crediamo possa avere un </a:t>
+            </a:r>
+            <a:r>
+              <a:rPr lang="it-IT" b="1" dirty="0">
+                <a:latin typeface="Calibri" panose="020F0502020204030204" pitchFamily="34" charset="0"/>
+                <a:ea typeface="Calibri" panose="020F0502020204030204" pitchFamily="34" charset="0"/>
+                <a:cs typeface="Calibri" panose="020F0502020204030204" pitchFamily="34" charset="0"/>
+              </a:rPr>
+              <a:t>forte valore</a:t>
+            </a:r>
+            <a:r>
+              <a:rPr lang="it-IT" dirty="0">
+                <a:latin typeface="Calibri" panose="020F0502020204030204" pitchFamily="34" charset="0"/>
+                <a:ea typeface="Calibri" panose="020F0502020204030204" pitchFamily="34" charset="0"/>
+                <a:cs typeface="Calibri" panose="020F0502020204030204" pitchFamily="34" charset="0"/>
+              </a:rPr>
+              <a:t>…</a:t>
             </a:r>
           </a:p>
         </p:txBody>
@@ -4040,7 +4252,7 @@
     </p:spTree>
     <p:extLst>
       <p:ext uri="{BB962C8B-B14F-4D97-AF65-F5344CB8AC3E}">
-        <p14:creationId xmlns:p14="http://schemas.microsoft.com/office/powerpoint/2010/main" val="2477298547"/>
+        <p14:creationId xmlns:p14="http://schemas.microsoft.com/office/powerpoint/2010/main" val="849280786"/>
       </p:ext>
     </p:extLst>
   </p:cSld>
@@ -4051,174 +4263,6 @@
 </file>
 
 <file path=ppt/slides/slide10.xml><?xml version="1.0" encoding="utf-8"?>
-<p:sld xmlns:a="http://schemas.openxmlformats.org/drawingml/2006/main" xmlns:r="http://schemas.openxmlformats.org/officeDocument/2006/relationships" xmlns:p="http://schemas.openxmlformats.org/presentationml/2006/main">
-  <p:cSld>
-    <p:bg>
-      <p:bgPr>
-        <a:solidFill>
-          <a:srgbClr val="FFC000"/>
-        </a:solidFill>
-        <a:effectLst/>
-      </p:bgPr>
-    </p:bg>
-    <p:spTree>
-      <p:nvGrpSpPr>
-        <p:cNvPr id="1" name="">
-          <a:extLst>
-            <a:ext uri="{FF2B5EF4-FFF2-40B4-BE49-F238E27FC236}">
-              <a16:creationId xmlns:a16="http://schemas.microsoft.com/office/drawing/2014/main" id="{FE1770DB-13A3-F61E-18A6-D6B9CC738152}"/>
-            </a:ext>
-          </a:extLst>
-        </p:cNvPr>
-        <p:cNvGrpSpPr/>
-        <p:nvPr/>
-      </p:nvGrpSpPr>
-      <p:grpSpPr>
-        <a:xfrm>
-          <a:off x="0" y="0"/>
-          <a:ext cx="0" cy="0"/>
-          <a:chOff x="0" y="0"/>
-          <a:chExt cx="0" cy="0"/>
-        </a:xfrm>
-      </p:grpSpPr>
-      <p:sp>
-        <p:nvSpPr>
-          <p:cNvPr id="2" name="Titolo 1">
-            <a:extLst>
-              <a:ext uri="{FF2B5EF4-FFF2-40B4-BE49-F238E27FC236}">
-                <a16:creationId xmlns:a16="http://schemas.microsoft.com/office/drawing/2014/main" id="{F699F214-90F8-366C-EE6C-02EBFCD60480}"/>
-              </a:ext>
-            </a:extLst>
-          </p:cNvPr>
-          <p:cNvSpPr>
-            <a:spLocks noGrp="1"/>
-          </p:cNvSpPr>
-          <p:nvPr>
-            <p:ph type="ctrTitle"/>
-          </p:nvPr>
-        </p:nvSpPr>
-        <p:spPr>
-          <a:xfrm>
-            <a:off x="1199536" y="464573"/>
-            <a:ext cx="10038735" cy="5928853"/>
-          </a:xfrm>
-        </p:spPr>
-        <p:txBody>
-          <a:bodyPr>
-            <a:noAutofit/>
-          </a:bodyPr>
-          <a:lstStyle/>
-          <a:p>
-            <a:br>
-              <a:rPr lang="it-IT" sz="4800" dirty="0">
-                <a:latin typeface="Calibri" panose="020F0502020204030204" pitchFamily="34" charset="0"/>
-                <a:ea typeface="Calibri" panose="020F0502020204030204" pitchFamily="34" charset="0"/>
-                <a:cs typeface="Calibri" panose="020F0502020204030204" pitchFamily="34" charset="0"/>
-              </a:rPr>
-            </a:br>
-            <a:r>
-              <a:rPr lang="it-IT" sz="4800" dirty="0">
-                <a:latin typeface="Calibri" panose="020F0502020204030204" pitchFamily="34" charset="0"/>
-                <a:ea typeface="Calibri" panose="020F0502020204030204" pitchFamily="34" charset="0"/>
-                <a:cs typeface="Calibri" panose="020F0502020204030204" pitchFamily="34" charset="0"/>
-              </a:rPr>
-              <a:t>Parti.</a:t>
-            </a:r>
-            <a:br>
-              <a:rPr lang="it-IT" sz="4800" dirty="0">
-                <a:latin typeface="Calibri" panose="020F0502020204030204" pitchFamily="34" charset="0"/>
-                <a:ea typeface="Calibri" panose="020F0502020204030204" pitchFamily="34" charset="0"/>
-                <a:cs typeface="Calibri" panose="020F0502020204030204" pitchFamily="34" charset="0"/>
-              </a:rPr>
-            </a:br>
-            <a:r>
-              <a:rPr lang="it-IT" sz="4800" dirty="0">
-                <a:latin typeface="Calibri" panose="020F0502020204030204" pitchFamily="34" charset="0"/>
-                <a:ea typeface="Calibri" panose="020F0502020204030204" pitchFamily="34" charset="0"/>
-                <a:cs typeface="Calibri" panose="020F0502020204030204" pitchFamily="34" charset="0"/>
-              </a:rPr>
-              <a:t>Il </a:t>
-            </a:r>
-            <a:r>
-              <a:rPr lang="it-IT" sz="4800" b="1" dirty="0">
-                <a:latin typeface="Calibri" panose="020F0502020204030204" pitchFamily="34" charset="0"/>
-                <a:ea typeface="Calibri" panose="020F0502020204030204" pitchFamily="34" charset="0"/>
-                <a:cs typeface="Calibri" panose="020F0502020204030204" pitchFamily="34" charset="0"/>
-              </a:rPr>
-              <a:t>viaggio</a:t>
-            </a:r>
-            <a:r>
-              <a:rPr lang="it-IT" sz="4800" dirty="0">
-                <a:latin typeface="Calibri" panose="020F0502020204030204" pitchFamily="34" charset="0"/>
-                <a:ea typeface="Calibri" panose="020F0502020204030204" pitchFamily="34" charset="0"/>
-                <a:cs typeface="Calibri" panose="020F0502020204030204" pitchFamily="34" charset="0"/>
-              </a:rPr>
-              <a:t> è </a:t>
-            </a:r>
-            <a:r>
-              <a:rPr lang="it-IT" sz="4800" b="1" dirty="0">
-                <a:latin typeface="Calibri" panose="020F0502020204030204" pitchFamily="34" charset="0"/>
-                <a:ea typeface="Calibri" panose="020F0502020204030204" pitchFamily="34" charset="0"/>
-                <a:cs typeface="Calibri" panose="020F0502020204030204" pitchFamily="34" charset="0"/>
-              </a:rPr>
-              <a:t>lungo e complesso</a:t>
-            </a:r>
-            <a:r>
-              <a:rPr lang="it-IT" sz="4800" dirty="0">
-                <a:latin typeface="Calibri" panose="020F0502020204030204" pitchFamily="34" charset="0"/>
-                <a:ea typeface="Calibri" panose="020F0502020204030204" pitchFamily="34" charset="0"/>
-                <a:cs typeface="Calibri" panose="020F0502020204030204" pitchFamily="34" charset="0"/>
-              </a:rPr>
-              <a:t>, ci sono tante difficoltà, alcune che ti mettono a rischio vita, ma tu sopravvivi, non tutte le persone accanto a te hanno la stessa sorte…</a:t>
-            </a:r>
-            <a:br>
-              <a:rPr lang="it-IT" sz="4800" dirty="0">
-                <a:latin typeface="Calibri" panose="020F0502020204030204" pitchFamily="34" charset="0"/>
-                <a:ea typeface="Calibri" panose="020F0502020204030204" pitchFamily="34" charset="0"/>
-                <a:cs typeface="Calibri" panose="020F0502020204030204" pitchFamily="34" charset="0"/>
-              </a:rPr>
-            </a:br>
-            <a:r>
-              <a:rPr lang="it-IT" sz="4800" dirty="0">
-                <a:latin typeface="Calibri" panose="020F0502020204030204" pitchFamily="34" charset="0"/>
-                <a:ea typeface="Calibri" panose="020F0502020204030204" pitchFamily="34" charset="0"/>
-                <a:cs typeface="Calibri" panose="020F0502020204030204" pitchFamily="34" charset="0"/>
-              </a:rPr>
-              <a:t>Ti richiede molti più soldi di quelli che avevi preventivato e anche </a:t>
-            </a:r>
-            <a:r>
-              <a:rPr lang="it-IT" sz="4800" b="1" dirty="0">
-                <a:latin typeface="Calibri" panose="020F0502020204030204" pitchFamily="34" charset="0"/>
-                <a:ea typeface="Calibri" panose="020F0502020204030204" pitchFamily="34" charset="0"/>
-                <a:cs typeface="Calibri" panose="020F0502020204030204" pitchFamily="34" charset="0"/>
-              </a:rPr>
-              <a:t>tante energie </a:t>
-            </a:r>
-            <a:r>
-              <a:rPr lang="it-IT" sz="4800" dirty="0">
-                <a:latin typeface="Calibri" panose="020F0502020204030204" pitchFamily="34" charset="0"/>
-                <a:ea typeface="Calibri" panose="020F0502020204030204" pitchFamily="34" charset="0"/>
-                <a:cs typeface="Calibri" panose="020F0502020204030204" pitchFamily="34" charset="0"/>
-              </a:rPr>
-              <a:t>fisiche e mentali.</a:t>
-            </a:r>
-          </a:p>
-        </p:txBody>
-      </p:sp>
-    </p:spTree>
-    <p:extLst>
-      <p:ext uri="{BB962C8B-B14F-4D97-AF65-F5344CB8AC3E}">
-        <p14:creationId xmlns:p14="http://schemas.microsoft.com/office/powerpoint/2010/main" val="1244945942"/>
-      </p:ext>
-    </p:extLst>
-  </p:cSld>
-  <p:clrMapOvr>
-    <a:masterClrMapping/>
-  </p:clrMapOvr>
-</p:sld>
-</file>
-
-<file path=ppt/slides/slide11.xml><?xml version="1.0" encoding="utf-8"?>
 <p:sld xmlns:a="http://schemas.openxmlformats.org/drawingml/2006/main" xmlns:r="http://schemas.openxmlformats.org/officeDocument/2006/relationships" xmlns:p="http://schemas.openxmlformats.org/presentationml/2006/main">
   <p:cSld>
     <p:bg>
@@ -4356,7 +4400,7 @@
 </p:sld>
 </file>
 
-<file path=ppt/slides/slide12.xml><?xml version="1.0" encoding="utf-8"?>
+<file path=ppt/slides/slide11.xml><?xml version="1.0" encoding="utf-8"?>
 <p:sld xmlns:a="http://schemas.openxmlformats.org/drawingml/2006/main" xmlns:r="http://schemas.openxmlformats.org/officeDocument/2006/relationships" xmlns:p="http://schemas.openxmlformats.org/presentationml/2006/main">
   <p:cSld>
     <p:bg>
@@ -4405,8 +4449,8 @@
         </p:nvSpPr>
         <p:spPr>
           <a:xfrm>
-            <a:off x="1524000" y="798870"/>
-            <a:ext cx="9144000" cy="5260259"/>
+            <a:off x="1524000" y="798871"/>
+            <a:ext cx="9144000" cy="4451556"/>
           </a:xfrm>
         </p:spPr>
         <p:txBody>
@@ -4486,44 +4530,6 @@
                 <a:cs typeface="Calibri" panose="020F0502020204030204" pitchFamily="34" charset="0"/>
               </a:rPr>
               <a:t>… </a:t>
-            </a:r>
-            <a:br>
-              <a:rPr lang="it-IT" sz="5000" dirty="0">
-                <a:latin typeface="Calibri" panose="020F0502020204030204" pitchFamily="34" charset="0"/>
-                <a:ea typeface="Calibri" panose="020F0502020204030204" pitchFamily="34" charset="0"/>
-                <a:cs typeface="Calibri" panose="020F0502020204030204" pitchFamily="34" charset="0"/>
-              </a:rPr>
-            </a:br>
-            <a:br>
-              <a:rPr lang="it-IT" sz="5000" dirty="0">
-                <a:latin typeface="Calibri" panose="020F0502020204030204" pitchFamily="34" charset="0"/>
-                <a:ea typeface="Calibri" panose="020F0502020204030204" pitchFamily="34" charset="0"/>
-                <a:cs typeface="Calibri" panose="020F0502020204030204" pitchFamily="34" charset="0"/>
-              </a:rPr>
-            </a:br>
-            <a:r>
-              <a:rPr lang="it-IT" sz="5000" dirty="0">
-                <a:latin typeface="Calibri" panose="020F0502020204030204" pitchFamily="34" charset="0"/>
-                <a:ea typeface="Calibri" panose="020F0502020204030204" pitchFamily="34" charset="0"/>
-                <a:cs typeface="Calibri" panose="020F0502020204030204" pitchFamily="34" charset="0"/>
-              </a:rPr>
-              <a:t>Inoltre sei molto, molto </a:t>
-            </a:r>
-            <a:r>
-              <a:rPr lang="it-IT" sz="5000" b="1" dirty="0">
-                <a:latin typeface="Calibri" panose="020F0502020204030204" pitchFamily="34" charset="0"/>
-                <a:ea typeface="Calibri" panose="020F0502020204030204" pitchFamily="34" charset="0"/>
-                <a:cs typeface="Calibri" panose="020F0502020204030204" pitchFamily="34" charset="0"/>
-              </a:rPr>
-              <a:t>triste</a:t>
-            </a:r>
-            <a:r>
-              <a:rPr lang="it-IT" sz="5000" dirty="0">
-                <a:latin typeface="Calibri" panose="020F0502020204030204" pitchFamily="34" charset="0"/>
-                <a:ea typeface="Calibri" panose="020F0502020204030204" pitchFamily="34" charset="0"/>
-                <a:cs typeface="Calibri" panose="020F0502020204030204" pitchFamily="34" charset="0"/>
-              </a:rPr>
-              <a:t>…</a:t>
             </a:r>
             <a:br>
               <a:rPr lang="it-IT" sz="5000" dirty="0">
@@ -4553,7 +4559,7 @@
 </p:sld>
 </file>
 
-<file path=ppt/slides/slide13.xml><?xml version="1.0" encoding="utf-8"?>
+<file path=ppt/slides/slide12.xml><?xml version="1.0" encoding="utf-8"?>
 <p:sld xmlns:a="http://schemas.openxmlformats.org/drawingml/2006/main" xmlns:r="http://schemas.openxmlformats.org/officeDocument/2006/relationships" xmlns:p="http://schemas.openxmlformats.org/presentationml/2006/main">
   <p:cSld>
     <p:bg>
@@ -4633,7 +4639,7 @@
                 <a:ea typeface="Calibri" panose="020F0502020204030204" pitchFamily="34" charset="0"/>
                 <a:cs typeface="Calibri" panose="020F0502020204030204" pitchFamily="34" charset="0"/>
               </a:rPr>
-              <a:t>Ci vai, non avevi capito che c’era una </a:t>
+              <a:t>Ci vai, non avevi capito che ci fosse una </a:t>
             </a:r>
             <a:r>
               <a:rPr lang="it-IT" sz="4200" b="1" dirty="0">
@@ -4705,7 +4711,7 @@
 </p:sld>
 </file>
 
-<file path=ppt/slides/slide14.xml><?xml version="1.0" encoding="utf-8"?>
+<file path=ppt/slides/slide13.xml><?xml version="1.0" encoding="utf-8"?>
 <p:sld xmlns:a="http://schemas.openxmlformats.org/drawingml/2006/main" xmlns:r="http://schemas.openxmlformats.org/officeDocument/2006/relationships" xmlns:p="http://schemas.openxmlformats.org/presentationml/2006/main">
   <p:cSld>
     <p:bg>
@@ -4895,7 +4901,7 @@
 </p:sld>
 </file>
 
-<file path=ppt/slides/slide15.xml><?xml version="1.0" encoding="utf-8"?>
+<file path=ppt/slides/slide14.xml><?xml version="1.0" encoding="utf-8"?>
 <p:sld xmlns:a="http://schemas.openxmlformats.org/drawingml/2006/main" xmlns:r="http://schemas.openxmlformats.org/officeDocument/2006/relationships" xmlns:p="http://schemas.openxmlformats.org/presentationml/2006/main">
   <p:cSld>
     <p:bg>
@@ -4960,22 +4966,7 @@
                 <a:ea typeface="Calibri" panose="020F0502020204030204" pitchFamily="34" charset="0"/>
                 <a:cs typeface="Calibri" panose="020F0502020204030204" pitchFamily="34" charset="0"/>
               </a:rPr>
-              <a:t>Durante i giorni successivi inizi a conoscere la casa dove sarai ospite per qualche tempo </a:t>
-            </a:r>
-            <a:br>
-              <a:rPr lang="it-IT" sz="4000" dirty="0">
-                <a:latin typeface="Calibri" panose="020F0502020204030204" pitchFamily="34" charset="0"/>
-                <a:ea typeface="Calibri" panose="020F0502020204030204" pitchFamily="34" charset="0"/>
-                <a:cs typeface="Calibri" panose="020F0502020204030204" pitchFamily="34" charset="0"/>
-              </a:rPr>
-            </a:br>
-            <a:r>
-              <a:rPr lang="it-IT" sz="4000" dirty="0">
-                <a:latin typeface="Calibri" panose="020F0502020204030204" pitchFamily="34" charset="0"/>
-                <a:ea typeface="Calibri" panose="020F0502020204030204" pitchFamily="34" charset="0"/>
-                <a:cs typeface="Calibri" panose="020F0502020204030204" pitchFamily="34" charset="0"/>
-              </a:rPr>
-              <a:t>(se non hai capito male, 6 mesi)…</a:t>
+              <a:t>Durante i giorni successivi inizi a conoscere la casa dove sarai ospite per qualche tempo…</a:t>
             </a:r>
             <a:br>
               <a:rPr lang="it-IT" sz="4000" dirty="0">
@@ -5055,7 +5046,7 @@
 </p:sld>
 </file>
 
-<file path=ppt/slides/slide16.xml><?xml version="1.0" encoding="utf-8"?>
+<file path=ppt/slides/slide15.xml><?xml version="1.0" encoding="utf-8"?>
 <p:sld xmlns:a="http://schemas.openxmlformats.org/drawingml/2006/main" xmlns:r="http://schemas.openxmlformats.org/officeDocument/2006/relationships" xmlns:p="http://schemas.openxmlformats.org/presentationml/2006/main">
   <p:cSld>
     <p:bg>
@@ -5286,7 +5277,7 @@
 </p:sld>
 </file>
 
-<file path=ppt/slides/slide17.xml><?xml version="1.0" encoding="utf-8"?>
+<file path=ppt/slides/slide16.xml><?xml version="1.0" encoding="utf-8"?>
 <p:sld xmlns:a="http://schemas.openxmlformats.org/drawingml/2006/main" xmlns:r="http://schemas.openxmlformats.org/officeDocument/2006/relationships" xmlns:p="http://schemas.openxmlformats.org/presentationml/2006/main">
   <p:cSld>
     <p:bg>
@@ -5479,7 +5470,7 @@
 </p:sld>
 </file>
 
-<file path=ppt/slides/slide18.xml><?xml version="1.0" encoding="utf-8"?>
+<file path=ppt/slides/slide17.xml><?xml version="1.0" encoding="utf-8"?>
 <p:sld xmlns:a="http://schemas.openxmlformats.org/drawingml/2006/main" xmlns:r="http://schemas.openxmlformats.org/officeDocument/2006/relationships" xmlns:p="http://schemas.openxmlformats.org/presentationml/2006/main">
   <p:cSld>
     <p:bg>
@@ -5590,7 +5581,7 @@
                 <a:ea typeface="Calibri" panose="020F0502020204030204" pitchFamily="34" charset="0"/>
                 <a:cs typeface="Calibri" panose="020F0502020204030204" pitchFamily="34" charset="0"/>
               </a:rPr>
-              <a:t>Ti avevano detto che con l’arrivo a destinazione tutto sarebbe stato in discesa, ma non è così…</a:t>
+              <a:t>Immaginavi che con l’arrivo a destinazione tutto sarebbe stato in discesa, ma non è così…</a:t>
             </a:r>
             <a:br>
               <a:rPr lang="it-IT" sz="4000" dirty="0">
@@ -5638,7 +5629,7 @@
 </p:sld>
 </file>
 
-<file path=ppt/slides/slide19.xml><?xml version="1.0" encoding="utf-8"?>
+<file path=ppt/slides/slide18.xml><?xml version="1.0" encoding="utf-8"?>
 <p:sld xmlns:a="http://schemas.openxmlformats.org/drawingml/2006/main" xmlns:r="http://schemas.openxmlformats.org/officeDocument/2006/relationships" xmlns:p="http://schemas.openxmlformats.org/presentationml/2006/main">
   <p:cSld>
     <p:bg>
@@ -5767,6 +5758,150 @@
 </p:sld>
 </file>
 
+<file path=ppt/slides/slide19.xml><?xml version="1.0" encoding="utf-8"?>
+<p:sld xmlns:a="http://schemas.openxmlformats.org/drawingml/2006/main" xmlns:r="http://schemas.openxmlformats.org/officeDocument/2006/relationships" xmlns:p="http://schemas.openxmlformats.org/presentationml/2006/main">
+  <p:cSld>
+    <p:bg>
+      <p:bgPr>
+        <a:solidFill>
+          <a:srgbClr val="FFFF00"/>
+        </a:solidFill>
+        <a:effectLst/>
+      </p:bgPr>
+    </p:bg>
+    <p:spTree>
+      <p:nvGrpSpPr>
+        <p:cNvPr id="1" name="">
+          <a:extLst>
+            <a:ext uri="{FF2B5EF4-FFF2-40B4-BE49-F238E27FC236}">
+              <a16:creationId xmlns:a16="http://schemas.microsoft.com/office/drawing/2014/main" id="{04E57123-0256-3503-D520-9D3BE9C78A2B}"/>
+            </a:ext>
+          </a:extLst>
+        </p:cNvPr>
+        <p:cNvGrpSpPr/>
+        <p:nvPr/>
+      </p:nvGrpSpPr>
+      <p:grpSpPr>
+        <a:xfrm>
+          <a:off x="0" y="0"/>
+          <a:ext cx="0" cy="0"/>
+          <a:chOff x="0" y="0"/>
+          <a:chExt cx="0" cy="0"/>
+        </a:xfrm>
+      </p:grpSpPr>
+      <p:sp>
+        <p:nvSpPr>
+          <p:cNvPr id="6" name="Titolo 1">
+            <a:extLst>
+              <a:ext uri="{FF2B5EF4-FFF2-40B4-BE49-F238E27FC236}">
+                <a16:creationId xmlns:a16="http://schemas.microsoft.com/office/drawing/2014/main" id="{84C97084-13DF-5A28-56E4-1E244EA2AA1B}"/>
+              </a:ext>
+            </a:extLst>
+          </p:cNvPr>
+          <p:cNvSpPr>
+            <a:spLocks noGrp="1"/>
+          </p:cNvSpPr>
+          <p:nvPr>
+            <p:ph type="ctrTitle"/>
+          </p:nvPr>
+        </p:nvSpPr>
+        <p:spPr>
+          <a:xfrm>
+            <a:off x="0" y="254644"/>
+            <a:ext cx="12107119" cy="6208688"/>
+          </a:xfrm>
+        </p:spPr>
+        <p:txBody>
+          <a:bodyPr>
+            <a:noAutofit/>
+          </a:bodyPr>
+          <a:lstStyle/>
+          <a:p>
+            <a:r>
+              <a:rPr lang="it-IT" sz="4000" dirty="0">
+                <a:latin typeface="Calibri" panose="020F0502020204030204" pitchFamily="34" charset="0"/>
+                <a:ea typeface="Calibri" panose="020F0502020204030204" pitchFamily="34" charset="0"/>
+                <a:cs typeface="Calibri" panose="020F0502020204030204" pitchFamily="34" charset="0"/>
+              </a:rPr>
+              <a:t>Altra cosa che non avevi considerato: quanto è difficile avere un </a:t>
+            </a:r>
+            <a:r>
+              <a:rPr lang="it-IT" sz="4000" b="1" dirty="0">
+                <a:latin typeface="Calibri" panose="020F0502020204030204" pitchFamily="34" charset="0"/>
+                <a:ea typeface="Calibri" panose="020F0502020204030204" pitchFamily="34" charset="0"/>
+                <a:cs typeface="Calibri" panose="020F0502020204030204" pitchFamily="34" charset="0"/>
+              </a:rPr>
+              <a:t>colore della pelle diverso </a:t>
+            </a:r>
+            <a:r>
+              <a:rPr lang="it-IT" sz="4000" dirty="0">
+                <a:latin typeface="Calibri" panose="020F0502020204030204" pitchFamily="34" charset="0"/>
+                <a:ea typeface="Calibri" panose="020F0502020204030204" pitchFamily="34" charset="0"/>
+                <a:cs typeface="Calibri" panose="020F0502020204030204" pitchFamily="34" charset="0"/>
+              </a:rPr>
+              <a:t>dalla maggior parte delle persone che vivono nel Paese dove abiti!</a:t>
+            </a:r>
+            <a:br>
+              <a:rPr lang="it-IT" sz="4000" dirty="0">
+                <a:latin typeface="Calibri" panose="020F0502020204030204" pitchFamily="34" charset="0"/>
+                <a:ea typeface="Calibri" panose="020F0502020204030204" pitchFamily="34" charset="0"/>
+                <a:cs typeface="Calibri" panose="020F0502020204030204" pitchFamily="34" charset="0"/>
+              </a:rPr>
+            </a:br>
+            <a:r>
+              <a:rPr lang="it-IT" sz="4000" dirty="0">
+                <a:latin typeface="Calibri" panose="020F0502020204030204" pitchFamily="34" charset="0"/>
+                <a:ea typeface="Calibri" panose="020F0502020204030204" pitchFamily="34" charset="0"/>
+                <a:cs typeface="Calibri" panose="020F0502020204030204" pitchFamily="34" charset="0"/>
+              </a:rPr>
+              <a:t>Perché è così importante? E perché in molte situazioni ti capita di subire insulti e discriminazioni per questo?</a:t>
+            </a:r>
+            <a:br>
+              <a:rPr lang="it-IT" sz="4000" dirty="0">
+                <a:latin typeface="Calibri" panose="020F0502020204030204" pitchFamily="34" charset="0"/>
+                <a:ea typeface="Calibri" panose="020F0502020204030204" pitchFamily="34" charset="0"/>
+                <a:cs typeface="Calibri" panose="020F0502020204030204" pitchFamily="34" charset="0"/>
+              </a:rPr>
+            </a:br>
+            <a:r>
+              <a:rPr lang="it-IT" sz="4000" dirty="0">
+                <a:latin typeface="Calibri" panose="020F0502020204030204" pitchFamily="34" charset="0"/>
+                <a:ea typeface="Calibri" panose="020F0502020204030204" pitchFamily="34" charset="0"/>
+                <a:cs typeface="Calibri" panose="020F0502020204030204" pitchFamily="34" charset="0"/>
+              </a:rPr>
+              <a:t>Capita così tante volte e quasi ti ci stai abituando, ma non bisogna abituarsi!</a:t>
+            </a:r>
+            <a:br>
+              <a:rPr lang="it-IT" sz="4000" dirty="0">
+                <a:latin typeface="Calibri" panose="020F0502020204030204" pitchFamily="34" charset="0"/>
+                <a:ea typeface="Calibri" panose="020F0502020204030204" pitchFamily="34" charset="0"/>
+                <a:cs typeface="Calibri" panose="020F0502020204030204" pitchFamily="34" charset="0"/>
+              </a:rPr>
+            </a:br>
+            <a:r>
+              <a:rPr lang="it-IT" sz="4000" i="1" dirty="0">
+                <a:latin typeface="Calibri" panose="020F0502020204030204" pitchFamily="34" charset="0"/>
+                <a:ea typeface="Calibri" panose="020F0502020204030204" pitchFamily="34" charset="0"/>
+                <a:cs typeface="Calibri" panose="020F0502020204030204" pitchFamily="34" charset="0"/>
+              </a:rPr>
+              <a:t>Nota tecnica: si chiamano «micro aggressioni», sono sottili, quasi invisibili, ma hanno un impatto negativo fortissimo sulla persona!</a:t>
+            </a:r>
+          </a:p>
+        </p:txBody>
+      </p:sp>
+    </p:spTree>
+    <p:extLst>
+      <p:ext uri="{BB962C8B-B14F-4D97-AF65-F5344CB8AC3E}">
+        <p14:creationId xmlns:p14="http://schemas.microsoft.com/office/powerpoint/2010/main" val="3707736968"/>
+      </p:ext>
+    </p:extLst>
+  </p:cSld>
+  <p:clrMapOvr>
+    <a:masterClrMapping/>
+  </p:clrMapOvr>
+</p:sld>
+</file>
+
 <file path=ppt/slides/slide2.xml><?xml version="1.0" encoding="utf-8"?>
 <p:sld xmlns:a="http://schemas.openxmlformats.org/drawingml/2006/main" xmlns:r="http://schemas.openxmlformats.org/officeDocument/2006/relationships" xmlns:p="http://schemas.openxmlformats.org/presentationml/2006/main">
   <p:cSld>
@@ -5780,7 +5915,13 @@
     </p:bg>
     <p:spTree>
       <p:nvGrpSpPr>
-        <p:cNvPr id="1" name=""/>
+        <p:cNvPr id="1" name="">
+          <a:extLst>
+            <a:ext uri="{FF2B5EF4-FFF2-40B4-BE49-F238E27FC236}">
+              <a16:creationId xmlns:a16="http://schemas.microsoft.com/office/drawing/2014/main" id="{E8DEA041-190D-D3B6-568B-95A804E4F7FD}"/>
+            </a:ext>
+          </a:extLst>
+        </p:cNvPr>
         <p:cNvGrpSpPr/>
         <p:nvPr/>
       </p:nvGrpSpPr>
@@ -5797,7 +5938,7 @@
           <p:cNvPr id="2" name="Titolo 1">
             <a:extLst>
               <a:ext uri="{FF2B5EF4-FFF2-40B4-BE49-F238E27FC236}">
-                <a16:creationId xmlns:a16="http://schemas.microsoft.com/office/drawing/2014/main" id="{03653811-4608-F144-A825-AE815F2ACA54}"/>
+                <a16:creationId xmlns:a16="http://schemas.microsoft.com/office/drawing/2014/main" id="{5B78944A-807F-6C3C-A9B4-84E3948EA651}"/>
               </a:ext>
             </a:extLst>
           </p:cNvPr>
@@ -5810,8 +5951,8 @@
         </p:nvSpPr>
         <p:spPr>
           <a:xfrm>
-            <a:off x="555522" y="688259"/>
-            <a:ext cx="11080955" cy="5309266"/>
+            <a:off x="1524000" y="813696"/>
+            <a:ext cx="9144000" cy="4463692"/>
           </a:xfrm>
         </p:spPr>
         <p:txBody>
@@ -5821,51 +5962,12 @@
           <a:lstStyle/>
           <a:p>
             <a:r>
-              <a:rPr lang="it-IT" b="1" dirty="0">
-                <a:latin typeface="Calibri" panose="020F0502020204030204" pitchFamily="34" charset="0"/>
-                <a:ea typeface="Calibri" panose="020F0502020204030204" pitchFamily="34" charset="0"/>
-                <a:cs typeface="Calibri" panose="020F0502020204030204" pitchFamily="34" charset="0"/>
-              </a:rPr>
-              <a:t>Buongiorno</a:t>
-            </a:r>
-            <a:r>
               <a:rPr lang="it-IT" dirty="0">
                 <a:latin typeface="Calibri" panose="020F0502020204030204" pitchFamily="34" charset="0"/>
                 <a:ea typeface="Calibri" panose="020F0502020204030204" pitchFamily="34" charset="0"/>
                 <a:cs typeface="Calibri" panose="020F0502020204030204" pitchFamily="34" charset="0"/>
               </a:rPr>
-              <a:t>, </a:t>
-            </a:r>
-            <a:br>
-              <a:rPr lang="it-IT" dirty="0">
-                <a:latin typeface="Calibri" panose="020F0502020204030204" pitchFamily="34" charset="0"/>
-                <a:ea typeface="Calibri" panose="020F0502020204030204" pitchFamily="34" charset="0"/>
-                <a:cs typeface="Calibri" panose="020F0502020204030204" pitchFamily="34" charset="0"/>
-              </a:rPr>
-            </a:br>
-            <a:r>
-              <a:rPr lang="it-IT" dirty="0">
-                <a:latin typeface="Calibri" panose="020F0502020204030204" pitchFamily="34" charset="0"/>
-                <a:ea typeface="Calibri" panose="020F0502020204030204" pitchFamily="34" charset="0"/>
-                <a:cs typeface="Calibri" panose="020F0502020204030204" pitchFamily="34" charset="0"/>
-              </a:rPr>
-              <a:t>sei pronto per immergerti in un’</a:t>
-            </a:r>
-            <a:r>
-              <a:rPr lang="it-IT" b="1" dirty="0">
-                <a:latin typeface="Calibri" panose="020F0502020204030204" pitchFamily="34" charset="0"/>
-                <a:ea typeface="Calibri" panose="020F0502020204030204" pitchFamily="34" charset="0"/>
-                <a:cs typeface="Calibri" panose="020F0502020204030204" pitchFamily="34" charset="0"/>
-              </a:rPr>
-              <a:t>esperienza riflessiva</a:t>
-            </a:r>
-            <a:r>
-              <a:rPr lang="it-IT" dirty="0">
-                <a:latin typeface="Calibri" panose="020F0502020204030204" pitchFamily="34" charset="0"/>
-                <a:ea typeface="Calibri" panose="020F0502020204030204" pitchFamily="34" charset="0"/>
-                <a:cs typeface="Calibri" panose="020F0502020204030204" pitchFamily="34" charset="0"/>
-              </a:rPr>
-              <a:t>?</a:t>
+              <a:t>Se sei ancora qui è perché hai accettato il nostro invito…</a:t>
             </a:r>
             <a:br>
               <a:rPr lang="it-IT" dirty="0">
@@ -5882,135 +5984,25 @@
               </a:rPr>
             </a:br>
             <a:r>
-              <a:rPr lang="it-IT" dirty="0">
-                <a:latin typeface="Calibri" panose="020F0502020204030204" pitchFamily="34" charset="0"/>
-                <a:ea typeface="Calibri" panose="020F0502020204030204" pitchFamily="34" charset="0"/>
-                <a:cs typeface="Calibri" panose="020F0502020204030204" pitchFamily="34" charset="0"/>
-              </a:rPr>
-              <a:t>Ti anticipiamo che sarà un po’ </a:t>
-            </a:r>
-            <a:r>
-              <a:rPr lang="it-IT" b="1" dirty="0">
-                <a:latin typeface="Calibri" panose="020F0502020204030204" pitchFamily="34" charset="0"/>
-                <a:ea typeface="Calibri" panose="020F0502020204030204" pitchFamily="34" charset="0"/>
-                <a:cs typeface="Calibri" panose="020F0502020204030204" pitchFamily="34" charset="0"/>
-              </a:rPr>
-              <a:t>impegnativa</a:t>
-            </a:r>
-            <a:r>
-              <a:rPr lang="it-IT" dirty="0">
-                <a:latin typeface="Calibri" panose="020F0502020204030204" pitchFamily="34" charset="0"/>
-                <a:ea typeface="Calibri" panose="020F0502020204030204" pitchFamily="34" charset="0"/>
-                <a:cs typeface="Calibri" panose="020F0502020204030204" pitchFamily="34" charset="0"/>
-              </a:rPr>
-              <a:t>, ma crediamo possa avere un </a:t>
-            </a:r>
-            <a:r>
-              <a:rPr lang="it-IT" b="1" dirty="0">
-                <a:latin typeface="Calibri" panose="020F0502020204030204" pitchFamily="34" charset="0"/>
-                <a:ea typeface="Calibri" panose="020F0502020204030204" pitchFamily="34" charset="0"/>
-                <a:cs typeface="Calibri" panose="020F0502020204030204" pitchFamily="34" charset="0"/>
-              </a:rPr>
-              <a:t>forte valore</a:t>
-            </a:r>
-            <a:r>
-              <a:rPr lang="it-IT" dirty="0">
-                <a:latin typeface="Calibri" panose="020F0502020204030204" pitchFamily="34" charset="0"/>
-                <a:ea typeface="Calibri" panose="020F0502020204030204" pitchFamily="34" charset="0"/>
-                <a:cs typeface="Calibri" panose="020F0502020204030204" pitchFamily="34" charset="0"/>
-              </a:rPr>
-              <a:t>…</a:t>
-            </a:r>
-          </a:p>
-        </p:txBody>
-      </p:sp>
-      <p:sp>
-        <p:nvSpPr>
-          <p:cNvPr id="4" name="Ovale 3">
-            <a:extLst>
-              <a:ext uri="{FF2B5EF4-FFF2-40B4-BE49-F238E27FC236}">
-                <a16:creationId xmlns:a16="http://schemas.microsoft.com/office/drawing/2014/main" id="{AEB23305-73B3-9D43-347E-EA76898D1CF6}"/>
-              </a:ext>
-            </a:extLst>
-          </p:cNvPr>
-          <p:cNvSpPr/>
-          <p:nvPr/>
-        </p:nvSpPr>
-        <p:spPr>
-          <a:xfrm>
-            <a:off x="137653" y="88491"/>
-            <a:ext cx="2222090" cy="1482289"/>
-          </a:xfrm>
-          <a:prstGeom prst="ellipse">
-            <a:avLst/>
-          </a:prstGeom>
-          <a:solidFill>
-            <a:schemeClr val="tx2">
-              <a:lumMod val="75000"/>
-              <a:lumOff val="25000"/>
-            </a:schemeClr>
-          </a:solidFill>
-          <a:ln>
-            <a:noFill/>
-          </a:ln>
-        </p:spPr>
-        <p:style>
-          <a:lnRef idx="2">
-            <a:schemeClr val="accent1">
-              <a:shade val="15000"/>
-            </a:schemeClr>
-          </a:lnRef>
-          <a:fillRef idx="1">
-            <a:schemeClr val="accent1"/>
-          </a:fillRef>
-          <a:effectRef idx="0">
-            <a:schemeClr val="accent1"/>
-          </a:effectRef>
-          <a:fontRef idx="minor">
-            <a:schemeClr val="lt1"/>
-          </a:fontRef>
-        </p:style>
-        <p:txBody>
-          <a:bodyPr rtlCol="0" anchor="ctr"/>
-          <a:lstStyle/>
-          <a:p>
-            <a:pPr algn="ctr"/>
-            <a:r>
-              <a:rPr lang="it-IT" dirty="0">
-                <a:ln>
-                  <a:solidFill>
-                    <a:sysClr val="windowText" lastClr="000000"/>
-                  </a:solidFill>
-                </a:ln>
-                <a:solidFill>
-                  <a:schemeClr val="bg1"/>
-                </a:solidFill>
-              </a:rPr>
-              <a:t>Musica di sottofondo: </a:t>
-            </a:r>
-          </a:p>
-          <a:p>
-            <a:pPr algn="ctr"/>
-            <a:r>
-              <a:rPr lang="it-IT" dirty="0">
-                <a:ln>
-                  <a:solidFill>
-                    <a:sysClr val="windowText" lastClr="000000"/>
-                  </a:solidFill>
-                </a:ln>
-                <a:solidFill>
-                  <a:schemeClr val="bg1"/>
-                </a:solidFill>
-              </a:rPr>
-              <a:t>Mission</a:t>
-            </a:r>
+              <a:rPr lang="it-IT" sz="10700" b="1" dirty="0">
+                <a:latin typeface="Calibri" panose="020F0502020204030204" pitchFamily="34" charset="0"/>
+                <a:ea typeface="Calibri" panose="020F0502020204030204" pitchFamily="34" charset="0"/>
+                <a:cs typeface="Calibri" panose="020F0502020204030204" pitchFamily="34" charset="0"/>
+              </a:rPr>
+              <a:t>BUON VIAGGIO!</a:t>
+            </a:r>
+            <a:endParaRPr lang="it-IT" b="1" dirty="0">
+              <a:latin typeface="Calibri" panose="020F0502020204030204" pitchFamily="34" charset="0"/>
+              <a:ea typeface="Calibri" panose="020F0502020204030204" pitchFamily="34" charset="0"/>
+              <a:cs typeface="Calibri" panose="020F0502020204030204" pitchFamily="34" charset="0"/>
+            </a:endParaRPr>
           </a:p>
         </p:txBody>
       </p:sp>
     </p:spTree>
     <p:extLst>
       <p:ext uri="{BB962C8B-B14F-4D97-AF65-F5344CB8AC3E}">
-        <p14:creationId xmlns:p14="http://schemas.microsoft.com/office/powerpoint/2010/main" val="849280786"/>
+        <p14:creationId xmlns:p14="http://schemas.microsoft.com/office/powerpoint/2010/main" val="3480115623"/>
       </p:ext>
     </p:extLst>
   </p:cSld>
@@ -6770,7 +6762,7 @@
               </a:rPr>
             </a:br>
             <a:r>
-              <a:rPr lang="it-IT" sz="4000" dirty="0">
+              <a:rPr lang="it-IT" sz="4000" b="1" dirty="0">
                 <a:latin typeface="Calibri" panose="020F0502020204030204" pitchFamily="34" charset="0"/>
                 <a:ea typeface="Calibri" panose="020F0502020204030204" pitchFamily="34" charset="0"/>
                 <a:cs typeface="Calibri" panose="020F0502020204030204" pitchFamily="34" charset="0"/>
@@ -6794,116 +6786,6 @@
 </file>
 
 <file path=ppt/slides/slide3.xml><?xml version="1.0" encoding="utf-8"?>
-<p:sld xmlns:a="http://schemas.openxmlformats.org/drawingml/2006/main" xmlns:r="http://schemas.openxmlformats.org/officeDocument/2006/relationships" xmlns:p="http://schemas.openxmlformats.org/presentationml/2006/main">
-  <p:cSld>
-    <p:bg>
-      <p:bgPr>
-        <a:solidFill>
-          <a:srgbClr val="FFC000"/>
-        </a:solidFill>
-        <a:effectLst/>
-      </p:bgPr>
-    </p:bg>
-    <p:spTree>
-      <p:nvGrpSpPr>
-        <p:cNvPr id="1" name="">
-          <a:extLst>
-            <a:ext uri="{FF2B5EF4-FFF2-40B4-BE49-F238E27FC236}">
-              <a16:creationId xmlns:a16="http://schemas.microsoft.com/office/drawing/2014/main" id="{E8DEA041-190D-D3B6-568B-95A804E4F7FD}"/>
-            </a:ext>
-          </a:extLst>
-        </p:cNvPr>
-        <p:cNvGrpSpPr/>
-        <p:nvPr/>
-      </p:nvGrpSpPr>
-      <p:grpSpPr>
-        <a:xfrm>
-          <a:off x="0" y="0"/>
-          <a:ext cx="0" cy="0"/>
-          <a:chOff x="0" y="0"/>
-          <a:chExt cx="0" cy="0"/>
-        </a:xfrm>
-      </p:grpSpPr>
-      <p:sp>
-        <p:nvSpPr>
-          <p:cNvPr id="2" name="Titolo 1">
-            <a:extLst>
-              <a:ext uri="{FF2B5EF4-FFF2-40B4-BE49-F238E27FC236}">
-                <a16:creationId xmlns:a16="http://schemas.microsoft.com/office/drawing/2014/main" id="{5B78944A-807F-6C3C-A9B4-84E3948EA651}"/>
-              </a:ext>
-            </a:extLst>
-          </p:cNvPr>
-          <p:cNvSpPr>
-            <a:spLocks noGrp="1"/>
-          </p:cNvSpPr>
-          <p:nvPr>
-            <p:ph type="ctrTitle"/>
-          </p:nvPr>
-        </p:nvSpPr>
-        <p:spPr>
-          <a:xfrm>
-            <a:off x="1524000" y="813696"/>
-            <a:ext cx="9144000" cy="4463692"/>
-          </a:xfrm>
-        </p:spPr>
-        <p:txBody>
-          <a:bodyPr>
-            <a:normAutofit fontScale="90000"/>
-          </a:bodyPr>
-          <a:lstStyle/>
-          <a:p>
-            <a:r>
-              <a:rPr lang="it-IT" dirty="0">
-                <a:latin typeface="Calibri" panose="020F0502020204030204" pitchFamily="34" charset="0"/>
-                <a:ea typeface="Calibri" panose="020F0502020204030204" pitchFamily="34" charset="0"/>
-                <a:cs typeface="Calibri" panose="020F0502020204030204" pitchFamily="34" charset="0"/>
-              </a:rPr>
-              <a:t>Se sei ancora qui è perché hai accettato il nostro invito…</a:t>
-            </a:r>
-            <a:br>
-              <a:rPr lang="it-IT" dirty="0">
-                <a:latin typeface="Calibri" panose="020F0502020204030204" pitchFamily="34" charset="0"/>
-                <a:ea typeface="Calibri" panose="020F0502020204030204" pitchFamily="34" charset="0"/>
-                <a:cs typeface="Calibri" panose="020F0502020204030204" pitchFamily="34" charset="0"/>
-              </a:rPr>
-            </a:br>
-            <a:br>
-              <a:rPr lang="it-IT" dirty="0">
-                <a:latin typeface="Calibri" panose="020F0502020204030204" pitchFamily="34" charset="0"/>
-                <a:ea typeface="Calibri" panose="020F0502020204030204" pitchFamily="34" charset="0"/>
-                <a:cs typeface="Calibri" panose="020F0502020204030204" pitchFamily="34" charset="0"/>
-              </a:rPr>
-            </a:br>
-            <a:r>
-              <a:rPr lang="it-IT" sz="10700" b="1" dirty="0">
-                <a:latin typeface="Calibri" panose="020F0502020204030204" pitchFamily="34" charset="0"/>
-                <a:ea typeface="Calibri" panose="020F0502020204030204" pitchFamily="34" charset="0"/>
-                <a:cs typeface="Calibri" panose="020F0502020204030204" pitchFamily="34" charset="0"/>
-              </a:rPr>
-              <a:t>BUON VIAGGIO!</a:t>
-            </a:r>
-            <a:endParaRPr lang="it-IT" b="1" dirty="0">
-              <a:latin typeface="Calibri" panose="020F0502020204030204" pitchFamily="34" charset="0"/>
-              <a:ea typeface="Calibri" panose="020F0502020204030204" pitchFamily="34" charset="0"/>
-              <a:cs typeface="Calibri" panose="020F0502020204030204" pitchFamily="34" charset="0"/>
-            </a:endParaRPr>
-          </a:p>
-        </p:txBody>
-      </p:sp>
-    </p:spTree>
-    <p:extLst>
-      <p:ext uri="{BB962C8B-B14F-4D97-AF65-F5344CB8AC3E}">
-        <p14:creationId xmlns:p14="http://schemas.microsoft.com/office/powerpoint/2010/main" val="3480115623"/>
-      </p:ext>
-    </p:extLst>
-  </p:cSld>
-  <p:clrMapOvr>
-    <a:masterClrMapping/>
-  </p:clrMapOvr>
-</p:sld>
-</file>
-
-<file path=ppt/slides/slide4.xml><?xml version="1.0" encoding="utf-8"?>
 <p:sld xmlns:a="http://schemas.openxmlformats.org/drawingml/2006/main" xmlns:r="http://schemas.openxmlformats.org/officeDocument/2006/relationships" xmlns:p="http://schemas.openxmlformats.org/presentationml/2006/main">
   <p:cSld>
     <p:bg>
@@ -7086,7 +6968,7 @@
 </p:sld>
 </file>
 
-<file path=ppt/slides/slide5.xml><?xml version="1.0" encoding="utf-8"?>
+<file path=ppt/slides/slide4.xml><?xml version="1.0" encoding="utf-8"?>
 <p:sld xmlns:a="http://schemas.openxmlformats.org/drawingml/2006/main" xmlns:r="http://schemas.openxmlformats.org/officeDocument/2006/relationships" xmlns:p="http://schemas.openxmlformats.org/presentationml/2006/main">
   <p:cSld>
     <p:bg>
@@ -7256,7 +7138,7 @@
 </p:sld>
 </file>
 
-<file path=ppt/slides/slide6.xml><?xml version="1.0" encoding="utf-8"?>
+<file path=ppt/slides/slide5.xml><?xml version="1.0" encoding="utf-8"?>
 <p:sld xmlns:a="http://schemas.openxmlformats.org/drawingml/2006/main" xmlns:r="http://schemas.openxmlformats.org/officeDocument/2006/relationships" xmlns:p="http://schemas.openxmlformats.org/presentationml/2006/main">
   <p:cSld>
     <p:bg>
@@ -7316,7 +7198,7 @@
           <a:lstStyle/>
           <a:p>
             <a:r>
-              <a:rPr lang="it-IT" sz="5000" i="1" dirty="0">
+              <a:rPr lang="it-IT" sz="5000" dirty="0">
                 <a:latin typeface="Calibri" panose="020F0502020204030204" pitchFamily="34" charset="0"/>
                 <a:ea typeface="Calibri" panose="020F0502020204030204" pitchFamily="34" charset="0"/>
                 <a:cs typeface="Calibri" panose="020F0502020204030204" pitchFamily="34" charset="0"/>
@@ -7324,7 +7206,7 @@
               <a:t>Ora ti chiediamo di immaginare …</a:t>
             </a:r>
             <a:br>
-              <a:rPr lang="it-IT" sz="5000" i="1" dirty="0">
+              <a:rPr lang="it-IT" sz="5000" dirty="0">
                 <a:latin typeface="Calibri" panose="020F0502020204030204" pitchFamily="34" charset="0"/>
                 <a:ea typeface="Calibri" panose="020F0502020204030204" pitchFamily="34" charset="0"/>
                 <a:cs typeface="Calibri" panose="020F0502020204030204" pitchFamily="34" charset="0"/>
@@ -7376,15 +7258,15 @@
               </a:rPr>
             </a:br>
             <a:r>
-              <a:rPr lang="it-IT" sz="5000" i="1" dirty="0">
-                <a:latin typeface="Calibri" panose="020F0502020204030204" pitchFamily="34" charset="0"/>
-                <a:ea typeface="Calibri" panose="020F0502020204030204" pitchFamily="34" charset="0"/>
-                <a:cs typeface="Calibri" panose="020F0502020204030204" pitchFamily="34" charset="0"/>
-              </a:rPr>
-              <a:t>… prova ad immaginarti un problema talmente grande che ha a che fare con la </a:t>
-            </a:r>
-            <a:r>
-              <a:rPr lang="it-IT" sz="5000" b="1" i="1" dirty="0">
+              <a:rPr lang="it-IT" sz="5000" dirty="0">
+                <a:latin typeface="Calibri" panose="020F0502020204030204" pitchFamily="34" charset="0"/>
+                <a:ea typeface="Calibri" panose="020F0502020204030204" pitchFamily="34" charset="0"/>
+                <a:cs typeface="Calibri" panose="020F0502020204030204" pitchFamily="34" charset="0"/>
+              </a:rPr>
+              <a:t>… un problema talmente grande che ha a che fare con la </a:t>
+            </a:r>
+            <a:r>
+              <a:rPr lang="it-IT" sz="5000" b="1" dirty="0">
                 <a:latin typeface="Calibri" panose="020F0502020204030204" pitchFamily="34" charset="0"/>
                 <a:ea typeface="Calibri" panose="020F0502020204030204" pitchFamily="34" charset="0"/>
                 <a:cs typeface="Calibri" panose="020F0502020204030204" pitchFamily="34" charset="0"/>
@@ -7392,79 +7274,12 @@
               <a:t>sopravvivenza</a:t>
             </a:r>
             <a:r>
-              <a:rPr lang="it-IT" sz="5000" i="1" dirty="0">
+              <a:rPr lang="it-IT" sz="5000" dirty="0">
                 <a:latin typeface="Calibri" panose="020F0502020204030204" pitchFamily="34" charset="0"/>
                 <a:ea typeface="Calibri" panose="020F0502020204030204" pitchFamily="34" charset="0"/>
                 <a:cs typeface="Calibri" panose="020F0502020204030204" pitchFamily="34" charset="0"/>
               </a:rPr>
               <a:t>…</a:t>
-            </a:r>
-          </a:p>
-        </p:txBody>
-      </p:sp>
-      <p:sp>
-        <p:nvSpPr>
-          <p:cNvPr id="4" name="Ovale 3">
-            <a:extLst>
-              <a:ext uri="{FF2B5EF4-FFF2-40B4-BE49-F238E27FC236}">
-                <a16:creationId xmlns:a16="http://schemas.microsoft.com/office/drawing/2014/main" id="{FA973740-0498-78ED-45F2-4145075769B9}"/>
-              </a:ext>
-            </a:extLst>
-          </p:cNvPr>
-          <p:cNvSpPr/>
-          <p:nvPr/>
-        </p:nvSpPr>
-        <p:spPr>
-          <a:xfrm>
-            <a:off x="137653" y="108155"/>
-            <a:ext cx="1651818" cy="1209367"/>
-          </a:xfrm>
-          <a:prstGeom prst="ellipse">
-            <a:avLst/>
-          </a:prstGeom>
-          <a:solidFill>
-            <a:schemeClr val="tx2">
-              <a:lumMod val="75000"/>
-              <a:lumOff val="25000"/>
-            </a:schemeClr>
-          </a:solidFill>
-          <a:ln>
-            <a:noFill/>
-          </a:ln>
-        </p:spPr>
-        <p:style>
-          <a:lnRef idx="2">
-            <a:schemeClr val="accent1">
-              <a:shade val="15000"/>
-            </a:schemeClr>
-          </a:lnRef>
-          <a:fillRef idx="1">
-            <a:schemeClr val="accent1"/>
-          </a:fillRef>
-          <a:effectRef idx="0">
-            <a:schemeClr val="accent1"/>
-          </a:effectRef>
-          <a:fontRef idx="minor">
-            <a:schemeClr val="lt1"/>
-          </a:fontRef>
-        </p:style>
-        <p:txBody>
-          <a:bodyPr rtlCol="0" anchor="ctr"/>
-          <a:lstStyle/>
-          <a:p>
-            <a:pPr algn="ctr"/>
-            <a:r>
-              <a:rPr lang="it-IT" dirty="0">
-                <a:ln>
-                  <a:solidFill>
-                    <a:sysClr val="windowText" lastClr="000000"/>
-                  </a:solidFill>
-                </a:ln>
-                <a:solidFill>
-                  <a:schemeClr val="bg1"/>
-                </a:solidFill>
-              </a:rPr>
-              <a:t>Musica sfuma e si ferma</a:t>
             </a:r>
           </a:p>
         </p:txBody>
@@ -7473,6 +7288,142 @@
     <p:extLst>
       <p:ext uri="{BB962C8B-B14F-4D97-AF65-F5344CB8AC3E}">
         <p14:creationId xmlns:p14="http://schemas.microsoft.com/office/powerpoint/2010/main" val="1889064227"/>
+      </p:ext>
+    </p:extLst>
+  </p:cSld>
+  <p:clrMapOvr>
+    <a:masterClrMapping/>
+  </p:clrMapOvr>
+</p:sld>
+</file>
+
+<file path=ppt/slides/slide6.xml><?xml version="1.0" encoding="utf-8"?>
+<p:sld xmlns:a="http://schemas.openxmlformats.org/drawingml/2006/main" xmlns:r="http://schemas.openxmlformats.org/officeDocument/2006/relationships" xmlns:p="http://schemas.openxmlformats.org/presentationml/2006/main">
+  <p:cSld>
+    <p:bg>
+      <p:bgPr>
+        <a:solidFill>
+          <a:srgbClr val="FF0000"/>
+        </a:solidFill>
+        <a:effectLst/>
+      </p:bgPr>
+    </p:bg>
+    <p:spTree>
+      <p:nvGrpSpPr>
+        <p:cNvPr id="1" name=""/>
+        <p:cNvGrpSpPr/>
+        <p:nvPr/>
+      </p:nvGrpSpPr>
+      <p:grpSpPr>
+        <a:xfrm>
+          <a:off x="0" y="0"/>
+          <a:ext cx="0" cy="0"/>
+          <a:chOff x="0" y="0"/>
+          <a:chExt cx="0" cy="0"/>
+        </a:xfrm>
+      </p:grpSpPr>
+      <p:sp>
+        <p:nvSpPr>
+          <p:cNvPr id="2" name="Titolo 1">
+            <a:extLst>
+              <a:ext uri="{FF2B5EF4-FFF2-40B4-BE49-F238E27FC236}">
+                <a16:creationId xmlns:a16="http://schemas.microsoft.com/office/drawing/2014/main" id="{EE78D213-D99E-3D7B-E70B-E2E9DE4253D7}"/>
+              </a:ext>
+            </a:extLst>
+          </p:cNvPr>
+          <p:cNvSpPr>
+            <a:spLocks noGrp="1"/>
+          </p:cNvSpPr>
+          <p:nvPr>
+            <p:ph type="ctrTitle"/>
+          </p:nvPr>
+        </p:nvSpPr>
+        <p:spPr>
+          <a:xfrm>
+            <a:off x="924232" y="383458"/>
+            <a:ext cx="10628671" cy="5702711"/>
+          </a:xfrm>
+        </p:spPr>
+        <p:txBody>
+          <a:bodyPr>
+            <a:noAutofit/>
+          </a:bodyPr>
+          <a:lstStyle/>
+          <a:p>
+            <a:r>
+              <a:rPr lang="it-IT" sz="5000" dirty="0">
+                <a:latin typeface="Calibri" panose="020F0502020204030204" pitchFamily="34" charset="0"/>
+                <a:ea typeface="Calibri" panose="020F0502020204030204" pitchFamily="34" charset="0"/>
+                <a:cs typeface="Calibri" panose="020F0502020204030204" pitchFamily="34" charset="0"/>
+              </a:rPr>
+              <a:t>Prendi la decisione di </a:t>
+            </a:r>
+            <a:r>
+              <a:rPr lang="it-IT" sz="5000" b="1" dirty="0">
+                <a:latin typeface="Calibri" panose="020F0502020204030204" pitchFamily="34" charset="0"/>
+                <a:ea typeface="Calibri" panose="020F0502020204030204" pitchFamily="34" charset="0"/>
+                <a:cs typeface="Calibri" panose="020F0502020204030204" pitchFamily="34" charset="0"/>
+              </a:rPr>
+              <a:t>partire</a:t>
+            </a:r>
+            <a:r>
+              <a:rPr lang="it-IT" sz="5000" dirty="0">
+                <a:latin typeface="Calibri" panose="020F0502020204030204" pitchFamily="34" charset="0"/>
+                <a:ea typeface="Calibri" panose="020F0502020204030204" pitchFamily="34" charset="0"/>
+                <a:cs typeface="Calibri" panose="020F0502020204030204" pitchFamily="34" charset="0"/>
+              </a:rPr>
+              <a:t>, migrare, è la soluzione che ti sembra </a:t>
+            </a:r>
+            <a:r>
+              <a:rPr lang="it-IT" sz="5000" b="1" dirty="0">
+                <a:latin typeface="Calibri" panose="020F0502020204030204" pitchFamily="34" charset="0"/>
+                <a:ea typeface="Calibri" panose="020F0502020204030204" pitchFamily="34" charset="0"/>
+                <a:cs typeface="Calibri" panose="020F0502020204030204" pitchFamily="34" charset="0"/>
+              </a:rPr>
+              <a:t>migliore</a:t>
+            </a:r>
+            <a:r>
+              <a:rPr lang="it-IT" sz="5000" dirty="0">
+                <a:latin typeface="Calibri" panose="020F0502020204030204" pitchFamily="34" charset="0"/>
+                <a:ea typeface="Calibri" panose="020F0502020204030204" pitchFamily="34" charset="0"/>
+                <a:cs typeface="Calibri" panose="020F0502020204030204" pitchFamily="34" charset="0"/>
+              </a:rPr>
+              <a:t> viste le condizioni, non sai di preciso dove andrai…</a:t>
+            </a:r>
+            <a:br>
+              <a:rPr lang="it-IT" sz="5000" dirty="0">
+                <a:latin typeface="Calibri" panose="020F0502020204030204" pitchFamily="34" charset="0"/>
+                <a:ea typeface="Calibri" panose="020F0502020204030204" pitchFamily="34" charset="0"/>
+                <a:cs typeface="Calibri" panose="020F0502020204030204" pitchFamily="34" charset="0"/>
+              </a:rPr>
+            </a:br>
+            <a:br>
+              <a:rPr lang="it-IT" sz="5000" dirty="0">
+                <a:latin typeface="Calibri" panose="020F0502020204030204" pitchFamily="34" charset="0"/>
+                <a:ea typeface="Calibri" panose="020F0502020204030204" pitchFamily="34" charset="0"/>
+                <a:cs typeface="Calibri" panose="020F0502020204030204" pitchFamily="34" charset="0"/>
+              </a:rPr>
+            </a:br>
+            <a:r>
+              <a:rPr lang="it-IT" sz="3600" i="1" dirty="0">
+                <a:latin typeface="Calibri" panose="020F0502020204030204" pitchFamily="34" charset="0"/>
+                <a:ea typeface="Calibri" panose="020F0502020204030204" pitchFamily="34" charset="0"/>
+                <a:cs typeface="Calibri" panose="020F0502020204030204" pitchFamily="34" charset="0"/>
+              </a:rPr>
+              <a:t>Immagina: a prescindere dalla tua situazione familiare, le condizioni ti obbligano a partire in solitaria … sai che sarà complesso e tu provi la via per poi eventualmente facilitare altri componenti della tua famiglia.</a:t>
+            </a:r>
+            <a:endParaRPr lang="it-IT" sz="5000" i="1" dirty="0">
+              <a:latin typeface="Calibri" panose="020F0502020204030204" pitchFamily="34" charset="0"/>
+              <a:ea typeface="Calibri" panose="020F0502020204030204" pitchFamily="34" charset="0"/>
+              <a:cs typeface="Calibri" panose="020F0502020204030204" pitchFamily="34" charset="0"/>
+            </a:endParaRPr>
+          </a:p>
+        </p:txBody>
+      </p:sp>
+    </p:spTree>
+    <p:extLst>
+      <p:ext uri="{BB962C8B-B14F-4D97-AF65-F5344CB8AC3E}">
+        <p14:creationId xmlns:p14="http://schemas.microsoft.com/office/powerpoint/2010/main" val="206127288"/>
       </p:ext>
     </p:extLst>
   </p:cSld>
@@ -7512,142 +7463,6 @@
           <p:cNvPr id="2" name="Titolo 1">
             <a:extLst>
               <a:ext uri="{FF2B5EF4-FFF2-40B4-BE49-F238E27FC236}">
-                <a16:creationId xmlns:a16="http://schemas.microsoft.com/office/drawing/2014/main" id="{EE78D213-D99E-3D7B-E70B-E2E9DE4253D7}"/>
-              </a:ext>
-            </a:extLst>
-          </p:cNvPr>
-          <p:cNvSpPr>
-            <a:spLocks noGrp="1"/>
-          </p:cNvSpPr>
-          <p:nvPr>
-            <p:ph type="ctrTitle"/>
-          </p:nvPr>
-        </p:nvSpPr>
-        <p:spPr>
-          <a:xfrm>
-            <a:off x="924232" y="383458"/>
-            <a:ext cx="10628671" cy="5702711"/>
-          </a:xfrm>
-        </p:spPr>
-        <p:txBody>
-          <a:bodyPr>
-            <a:noAutofit/>
-          </a:bodyPr>
-          <a:lstStyle/>
-          <a:p>
-            <a:r>
-              <a:rPr lang="it-IT" sz="5000" dirty="0">
-                <a:latin typeface="Calibri" panose="020F0502020204030204" pitchFamily="34" charset="0"/>
-                <a:ea typeface="Calibri" panose="020F0502020204030204" pitchFamily="34" charset="0"/>
-                <a:cs typeface="Calibri" panose="020F0502020204030204" pitchFamily="34" charset="0"/>
-              </a:rPr>
-              <a:t>Prendi la decisione di </a:t>
-            </a:r>
-            <a:r>
-              <a:rPr lang="it-IT" sz="5000" b="1" dirty="0">
-                <a:latin typeface="Calibri" panose="020F0502020204030204" pitchFamily="34" charset="0"/>
-                <a:ea typeface="Calibri" panose="020F0502020204030204" pitchFamily="34" charset="0"/>
-                <a:cs typeface="Calibri" panose="020F0502020204030204" pitchFamily="34" charset="0"/>
-              </a:rPr>
-              <a:t>partire</a:t>
-            </a:r>
-            <a:r>
-              <a:rPr lang="it-IT" sz="5000" dirty="0">
-                <a:latin typeface="Calibri" panose="020F0502020204030204" pitchFamily="34" charset="0"/>
-                <a:ea typeface="Calibri" panose="020F0502020204030204" pitchFamily="34" charset="0"/>
-                <a:cs typeface="Calibri" panose="020F0502020204030204" pitchFamily="34" charset="0"/>
-              </a:rPr>
-              <a:t>, migrare, è la soluzione che ti sembra </a:t>
-            </a:r>
-            <a:r>
-              <a:rPr lang="it-IT" sz="5000" b="1" dirty="0">
-                <a:latin typeface="Calibri" panose="020F0502020204030204" pitchFamily="34" charset="0"/>
-                <a:ea typeface="Calibri" panose="020F0502020204030204" pitchFamily="34" charset="0"/>
-                <a:cs typeface="Calibri" panose="020F0502020204030204" pitchFamily="34" charset="0"/>
-              </a:rPr>
-              <a:t>migliore</a:t>
-            </a:r>
-            <a:r>
-              <a:rPr lang="it-IT" sz="5000" dirty="0">
-                <a:latin typeface="Calibri" panose="020F0502020204030204" pitchFamily="34" charset="0"/>
-                <a:ea typeface="Calibri" panose="020F0502020204030204" pitchFamily="34" charset="0"/>
-                <a:cs typeface="Calibri" panose="020F0502020204030204" pitchFamily="34" charset="0"/>
-              </a:rPr>
-              <a:t> viste le condizioni, non sai di preciso dove andrai…</a:t>
-            </a:r>
-            <a:br>
-              <a:rPr lang="it-IT" sz="5000" dirty="0">
-                <a:latin typeface="Calibri" panose="020F0502020204030204" pitchFamily="34" charset="0"/>
-                <a:ea typeface="Calibri" panose="020F0502020204030204" pitchFamily="34" charset="0"/>
-                <a:cs typeface="Calibri" panose="020F0502020204030204" pitchFamily="34" charset="0"/>
-              </a:rPr>
-            </a:br>
-            <a:br>
-              <a:rPr lang="it-IT" sz="5000" dirty="0">
-                <a:latin typeface="Calibri" panose="020F0502020204030204" pitchFamily="34" charset="0"/>
-                <a:ea typeface="Calibri" panose="020F0502020204030204" pitchFamily="34" charset="0"/>
-                <a:cs typeface="Calibri" panose="020F0502020204030204" pitchFamily="34" charset="0"/>
-              </a:rPr>
-            </a:br>
-            <a:r>
-              <a:rPr lang="it-IT" sz="3600" i="1" dirty="0">
-                <a:latin typeface="Calibri" panose="020F0502020204030204" pitchFamily="34" charset="0"/>
-                <a:ea typeface="Calibri" panose="020F0502020204030204" pitchFamily="34" charset="0"/>
-                <a:cs typeface="Calibri" panose="020F0502020204030204" pitchFamily="34" charset="0"/>
-              </a:rPr>
-              <a:t>Immagina: a prescindere dalla tua situazione familiare, le condizioni ti obbligano a partire in solitaria … sai che sarà complesso e tu provi la via per poi eventualmente facilitare altri componenti della tua famiglia.</a:t>
-            </a:r>
-            <a:endParaRPr lang="it-IT" sz="5000" i="1" dirty="0">
-              <a:latin typeface="Calibri" panose="020F0502020204030204" pitchFamily="34" charset="0"/>
-              <a:ea typeface="Calibri" panose="020F0502020204030204" pitchFamily="34" charset="0"/>
-              <a:cs typeface="Calibri" panose="020F0502020204030204" pitchFamily="34" charset="0"/>
-            </a:endParaRPr>
-          </a:p>
-        </p:txBody>
-      </p:sp>
-    </p:spTree>
-    <p:extLst>
-      <p:ext uri="{BB962C8B-B14F-4D97-AF65-F5344CB8AC3E}">
-        <p14:creationId xmlns:p14="http://schemas.microsoft.com/office/powerpoint/2010/main" val="206127288"/>
-      </p:ext>
-    </p:extLst>
-  </p:cSld>
-  <p:clrMapOvr>
-    <a:masterClrMapping/>
-  </p:clrMapOvr>
-</p:sld>
-</file>
-
-<file path=ppt/slides/slide8.xml><?xml version="1.0" encoding="utf-8"?>
-<p:sld xmlns:a="http://schemas.openxmlformats.org/drawingml/2006/main" xmlns:r="http://schemas.openxmlformats.org/officeDocument/2006/relationships" xmlns:p="http://schemas.openxmlformats.org/presentationml/2006/main">
-  <p:cSld>
-    <p:bg>
-      <p:bgPr>
-        <a:solidFill>
-          <a:srgbClr val="FF0000"/>
-        </a:solidFill>
-        <a:effectLst/>
-      </p:bgPr>
-    </p:bg>
-    <p:spTree>
-      <p:nvGrpSpPr>
-        <p:cNvPr id="1" name=""/>
-        <p:cNvGrpSpPr/>
-        <p:nvPr/>
-      </p:nvGrpSpPr>
-      <p:grpSpPr>
-        <a:xfrm>
-          <a:off x="0" y="0"/>
-          <a:ext cx="0" cy="0"/>
-          <a:chOff x="0" y="0"/>
-          <a:chExt cx="0" cy="0"/>
-        </a:xfrm>
-      </p:grpSpPr>
-      <p:sp>
-        <p:nvSpPr>
-          <p:cNvPr id="2" name="Titolo 1">
-            <a:extLst>
-              <a:ext uri="{FF2B5EF4-FFF2-40B4-BE49-F238E27FC236}">
                 <a16:creationId xmlns:a16="http://schemas.microsoft.com/office/drawing/2014/main" id="{ADAB2C70-3719-FC24-2FC3-D73C7D8AA6C7}"/>
               </a:ext>
             </a:extLst>
@@ -7834,7 +7649,7 @@
 </p:sld>
 </file>
 
-<file path=ppt/slides/slide9.xml><?xml version="1.0" encoding="utf-8"?>
+<file path=ppt/slides/slide8.xml><?xml version="1.0" encoding="utf-8"?>
 <p:sld xmlns:a="http://schemas.openxmlformats.org/drawingml/2006/main" xmlns:r="http://schemas.openxmlformats.org/officeDocument/2006/relationships" xmlns:p="http://schemas.openxmlformats.org/presentationml/2006/main">
   <p:cSld>
     <p:bg>
@@ -8081,6 +7896,174 @@
     <p:extLst>
       <p:ext uri="{BB962C8B-B14F-4D97-AF65-F5344CB8AC3E}">
         <p14:creationId xmlns:p14="http://schemas.microsoft.com/office/powerpoint/2010/main" val="1918548817"/>
+      </p:ext>
+    </p:extLst>
+  </p:cSld>
+  <p:clrMapOvr>
+    <a:masterClrMapping/>
+  </p:clrMapOvr>
+</p:sld>
+</file>
+
+<file path=ppt/slides/slide9.xml><?xml version="1.0" encoding="utf-8"?>
+<p:sld xmlns:a="http://schemas.openxmlformats.org/drawingml/2006/main" xmlns:r="http://schemas.openxmlformats.org/officeDocument/2006/relationships" xmlns:p="http://schemas.openxmlformats.org/presentationml/2006/main">
+  <p:cSld>
+    <p:bg>
+      <p:bgPr>
+        <a:solidFill>
+          <a:srgbClr val="FFC000"/>
+        </a:solidFill>
+        <a:effectLst/>
+      </p:bgPr>
+    </p:bg>
+    <p:spTree>
+      <p:nvGrpSpPr>
+        <p:cNvPr id="1" name="">
+          <a:extLst>
+            <a:ext uri="{FF2B5EF4-FFF2-40B4-BE49-F238E27FC236}">
+              <a16:creationId xmlns:a16="http://schemas.microsoft.com/office/drawing/2014/main" id="{FE1770DB-13A3-F61E-18A6-D6B9CC738152}"/>
+            </a:ext>
+          </a:extLst>
+        </p:cNvPr>
+        <p:cNvGrpSpPr/>
+        <p:nvPr/>
+      </p:nvGrpSpPr>
+      <p:grpSpPr>
+        <a:xfrm>
+          <a:off x="0" y="0"/>
+          <a:ext cx="0" cy="0"/>
+          <a:chOff x="0" y="0"/>
+          <a:chExt cx="0" cy="0"/>
+        </a:xfrm>
+      </p:grpSpPr>
+      <p:sp>
+        <p:nvSpPr>
+          <p:cNvPr id="2" name="Titolo 1">
+            <a:extLst>
+              <a:ext uri="{FF2B5EF4-FFF2-40B4-BE49-F238E27FC236}">
+                <a16:creationId xmlns:a16="http://schemas.microsoft.com/office/drawing/2014/main" id="{F699F214-90F8-366C-EE6C-02EBFCD60480}"/>
+              </a:ext>
+            </a:extLst>
+          </p:cNvPr>
+          <p:cNvSpPr>
+            <a:spLocks noGrp="1"/>
+          </p:cNvSpPr>
+          <p:nvPr>
+            <p:ph type="ctrTitle"/>
+          </p:nvPr>
+        </p:nvSpPr>
+        <p:spPr>
+          <a:xfrm>
+            <a:off x="1199536" y="464573"/>
+            <a:ext cx="10038735" cy="5928853"/>
+          </a:xfrm>
+        </p:spPr>
+        <p:txBody>
+          <a:bodyPr>
+            <a:noAutofit/>
+          </a:bodyPr>
+          <a:lstStyle/>
+          <a:p>
+            <a:br>
+              <a:rPr lang="it-IT" sz="4800" dirty="0">
+                <a:latin typeface="Calibri" panose="020F0502020204030204" pitchFamily="34" charset="0"/>
+                <a:ea typeface="Calibri" panose="020F0502020204030204" pitchFamily="34" charset="0"/>
+                <a:cs typeface="Calibri" panose="020F0502020204030204" pitchFamily="34" charset="0"/>
+              </a:rPr>
+            </a:br>
+            <a:r>
+              <a:rPr lang="it-IT" sz="4800" dirty="0">
+                <a:latin typeface="Calibri" panose="020F0502020204030204" pitchFamily="34" charset="0"/>
+                <a:ea typeface="Calibri" panose="020F0502020204030204" pitchFamily="34" charset="0"/>
+                <a:cs typeface="Calibri" panose="020F0502020204030204" pitchFamily="34" charset="0"/>
+              </a:rPr>
+              <a:t>Parti.</a:t>
+            </a:r>
+            <a:br>
+              <a:rPr lang="it-IT" sz="4800" dirty="0">
+                <a:latin typeface="Calibri" panose="020F0502020204030204" pitchFamily="34" charset="0"/>
+                <a:ea typeface="Calibri" panose="020F0502020204030204" pitchFamily="34" charset="0"/>
+                <a:cs typeface="Calibri" panose="020F0502020204030204" pitchFamily="34" charset="0"/>
+              </a:rPr>
+            </a:br>
+            <a:r>
+              <a:rPr lang="it-IT" sz="4800" dirty="0">
+                <a:latin typeface="Calibri" panose="020F0502020204030204" pitchFamily="34" charset="0"/>
+                <a:ea typeface="Calibri" panose="020F0502020204030204" pitchFamily="34" charset="0"/>
+                <a:cs typeface="Calibri" panose="020F0502020204030204" pitchFamily="34" charset="0"/>
+              </a:rPr>
+              <a:t>Il </a:t>
+            </a:r>
+            <a:r>
+              <a:rPr lang="it-IT" sz="4800" b="1" dirty="0">
+                <a:latin typeface="Calibri" panose="020F0502020204030204" pitchFamily="34" charset="0"/>
+                <a:ea typeface="Calibri" panose="020F0502020204030204" pitchFamily="34" charset="0"/>
+                <a:cs typeface="Calibri" panose="020F0502020204030204" pitchFamily="34" charset="0"/>
+              </a:rPr>
+              <a:t>viaggio</a:t>
+            </a:r>
+            <a:r>
+              <a:rPr lang="it-IT" sz="4800" dirty="0">
+                <a:latin typeface="Calibri" panose="020F0502020204030204" pitchFamily="34" charset="0"/>
+                <a:ea typeface="Calibri" panose="020F0502020204030204" pitchFamily="34" charset="0"/>
+                <a:cs typeface="Calibri" panose="020F0502020204030204" pitchFamily="34" charset="0"/>
+              </a:rPr>
+              <a:t> è </a:t>
+            </a:r>
+            <a:r>
+              <a:rPr lang="it-IT" sz="4800" b="1" dirty="0">
+                <a:latin typeface="Calibri" panose="020F0502020204030204" pitchFamily="34" charset="0"/>
+                <a:ea typeface="Calibri" panose="020F0502020204030204" pitchFamily="34" charset="0"/>
+                <a:cs typeface="Calibri" panose="020F0502020204030204" pitchFamily="34" charset="0"/>
+              </a:rPr>
+              <a:t>lungo e complesso</a:t>
+            </a:r>
+            <a:r>
+              <a:rPr lang="it-IT" sz="4800" dirty="0">
+                <a:latin typeface="Calibri" panose="020F0502020204030204" pitchFamily="34" charset="0"/>
+                <a:ea typeface="Calibri" panose="020F0502020204030204" pitchFamily="34" charset="0"/>
+                <a:cs typeface="Calibri" panose="020F0502020204030204" pitchFamily="34" charset="0"/>
+              </a:rPr>
+              <a:t>, ci sono tante difficoltà, alcune che ti mettono a rischio vita, ma tu sopravvivi, non tutte le persone accanto a te hanno la stessa sorte…</a:t>
+            </a:r>
+            <a:br>
+              <a:rPr lang="it-IT" sz="4800" dirty="0">
+                <a:latin typeface="Calibri" panose="020F0502020204030204" pitchFamily="34" charset="0"/>
+                <a:ea typeface="Calibri" panose="020F0502020204030204" pitchFamily="34" charset="0"/>
+                <a:cs typeface="Calibri" panose="020F0502020204030204" pitchFamily="34" charset="0"/>
+              </a:rPr>
+            </a:br>
+            <a:r>
+              <a:rPr lang="it-IT" sz="4800" dirty="0">
+                <a:latin typeface="Calibri" panose="020F0502020204030204" pitchFamily="34" charset="0"/>
+                <a:ea typeface="Calibri" panose="020F0502020204030204" pitchFamily="34" charset="0"/>
+                <a:cs typeface="Calibri" panose="020F0502020204030204" pitchFamily="34" charset="0"/>
+              </a:rPr>
+              <a:t>Ti richiede molti più soldi di quelli che avevi preventivato e anche </a:t>
+            </a:r>
+            <a:r>
+              <a:rPr lang="it-IT" sz="4800" b="1" dirty="0">
+                <a:latin typeface="Calibri" panose="020F0502020204030204" pitchFamily="34" charset="0"/>
+                <a:ea typeface="Calibri" panose="020F0502020204030204" pitchFamily="34" charset="0"/>
+                <a:cs typeface="Calibri" panose="020F0502020204030204" pitchFamily="34" charset="0"/>
+              </a:rPr>
+              <a:t>tante energie </a:t>
+            </a:r>
+            <a:r>
+              <a:rPr lang="it-IT" sz="4800" dirty="0">
+                <a:latin typeface="Calibri" panose="020F0502020204030204" pitchFamily="34" charset="0"/>
+                <a:ea typeface="Calibri" panose="020F0502020204030204" pitchFamily="34" charset="0"/>
+                <a:cs typeface="Calibri" panose="020F0502020204030204" pitchFamily="34" charset="0"/>
+              </a:rPr>
+              <a:t>fisiche e mentali.</a:t>
+            </a:r>
+          </a:p>
+        </p:txBody>
+      </p:sp>
+    </p:spTree>
+    <p:extLst>
+      <p:ext uri="{BB962C8B-B14F-4D97-AF65-F5344CB8AC3E}">
+        <p14:creationId xmlns:p14="http://schemas.microsoft.com/office/powerpoint/2010/main" val="1244945942"/>
       </p:ext>
     </p:extLst>
   </p:cSld>
